--- a/pics.pptx
+++ b/pics.pptx
@@ -7,6 +7,7 @@
   <p:sldIdLst>
     <p:sldId id="256" r:id="rId2"/>
     <p:sldId id="257" r:id="rId3"/>
+    <p:sldId id="258" r:id="rId4"/>
   </p:sldIdLst>
   <p:sldSz cx="12192000" cy="6858000"/>
   <p:notesSz cx="6858000" cy="9144000"/>
@@ -260,7 +261,7 @@
           <a:p>
             <a:fld id="{CFCC5A93-5ABE-4A6C-922D-83AD220C875C}" type="datetimeFigureOut">
               <a:rPr lang="en-US" smtClean="0"/>
-              <a:t>9/1/2025</a:t>
+              <a:t>9/25/2025</a:t>
             </a:fld>
             <a:endParaRPr lang="en-US"/>
           </a:p>
@@ -458,7 +459,7 @@
           <a:p>
             <a:fld id="{CFCC5A93-5ABE-4A6C-922D-83AD220C875C}" type="datetimeFigureOut">
               <a:rPr lang="en-US" smtClean="0"/>
-              <a:t>9/1/2025</a:t>
+              <a:t>9/25/2025</a:t>
             </a:fld>
             <a:endParaRPr lang="en-US"/>
           </a:p>
@@ -666,7 +667,7 @@
           <a:p>
             <a:fld id="{CFCC5A93-5ABE-4A6C-922D-83AD220C875C}" type="datetimeFigureOut">
               <a:rPr lang="en-US" smtClean="0"/>
-              <a:t>9/1/2025</a:t>
+              <a:t>9/25/2025</a:t>
             </a:fld>
             <a:endParaRPr lang="en-US"/>
           </a:p>
@@ -864,7 +865,7 @@
           <a:p>
             <a:fld id="{CFCC5A93-5ABE-4A6C-922D-83AD220C875C}" type="datetimeFigureOut">
               <a:rPr lang="en-US" smtClean="0"/>
-              <a:t>9/1/2025</a:t>
+              <a:t>9/25/2025</a:t>
             </a:fld>
             <a:endParaRPr lang="en-US"/>
           </a:p>
@@ -1139,7 +1140,7 @@
           <a:p>
             <a:fld id="{CFCC5A93-5ABE-4A6C-922D-83AD220C875C}" type="datetimeFigureOut">
               <a:rPr lang="en-US" smtClean="0"/>
-              <a:t>9/1/2025</a:t>
+              <a:t>9/25/2025</a:t>
             </a:fld>
             <a:endParaRPr lang="en-US"/>
           </a:p>
@@ -1404,7 +1405,7 @@
           <a:p>
             <a:fld id="{CFCC5A93-5ABE-4A6C-922D-83AD220C875C}" type="datetimeFigureOut">
               <a:rPr lang="en-US" smtClean="0"/>
-              <a:t>9/1/2025</a:t>
+              <a:t>9/25/2025</a:t>
             </a:fld>
             <a:endParaRPr lang="en-US"/>
           </a:p>
@@ -1816,7 +1817,7 @@
           <a:p>
             <a:fld id="{CFCC5A93-5ABE-4A6C-922D-83AD220C875C}" type="datetimeFigureOut">
               <a:rPr lang="en-US" smtClean="0"/>
-              <a:t>9/1/2025</a:t>
+              <a:t>9/25/2025</a:t>
             </a:fld>
             <a:endParaRPr lang="en-US"/>
           </a:p>
@@ -1957,7 +1958,7 @@
           <a:p>
             <a:fld id="{CFCC5A93-5ABE-4A6C-922D-83AD220C875C}" type="datetimeFigureOut">
               <a:rPr lang="en-US" smtClean="0"/>
-              <a:t>9/1/2025</a:t>
+              <a:t>9/25/2025</a:t>
             </a:fld>
             <a:endParaRPr lang="en-US"/>
           </a:p>
@@ -2070,7 +2071,7 @@
           <a:p>
             <a:fld id="{CFCC5A93-5ABE-4A6C-922D-83AD220C875C}" type="datetimeFigureOut">
               <a:rPr lang="en-US" smtClean="0"/>
-              <a:t>9/1/2025</a:t>
+              <a:t>9/25/2025</a:t>
             </a:fld>
             <a:endParaRPr lang="en-US"/>
           </a:p>
@@ -2381,7 +2382,7 @@
           <a:p>
             <a:fld id="{CFCC5A93-5ABE-4A6C-922D-83AD220C875C}" type="datetimeFigureOut">
               <a:rPr lang="en-US" smtClean="0"/>
-              <a:t>9/1/2025</a:t>
+              <a:t>9/25/2025</a:t>
             </a:fld>
             <a:endParaRPr lang="en-US"/>
           </a:p>
@@ -2669,7 +2670,7 @@
           <a:p>
             <a:fld id="{CFCC5A93-5ABE-4A6C-922D-83AD220C875C}" type="datetimeFigureOut">
               <a:rPr lang="en-US" smtClean="0"/>
-              <a:t>9/1/2025</a:t>
+              <a:t>9/25/2025</a:t>
             </a:fld>
             <a:endParaRPr lang="en-US"/>
           </a:p>
@@ -2910,7 +2911,7 @@
           <a:p>
             <a:fld id="{CFCC5A93-5ABE-4A6C-922D-83AD220C875C}" type="datetimeFigureOut">
               <a:rPr lang="en-US" smtClean="0"/>
-              <a:t>9/1/2025</a:t>
+              <a:t>9/25/2025</a:t>
             </a:fld>
             <a:endParaRPr lang="en-US"/>
           </a:p>
@@ -6642,8 +6643,8 @@
           </a:p>
         </p:txBody>
       </p:sp>
-      <mc:AlternateContent xmlns:mc="http://schemas.openxmlformats.org/markup-compatibility/2006">
-        <mc:Choice xmlns:a14="http://schemas.microsoft.com/office/drawing/2010/main" Requires="a14">
+      <mc:AlternateContent xmlns:mc="http://schemas.openxmlformats.org/markup-compatibility/2006" xmlns:a14="http://schemas.microsoft.com/office/drawing/2010/main">
+        <mc:Choice Requires="a14">
           <p:sp>
             <p:nvSpPr>
               <p:cNvPr id="9" name="TextBox 8">
@@ -6672,6 +6673,7 @@
               </a:bodyPr>
               <a:lstStyle/>
               <a:p>
+                <a:pPr/>
                 <a14:m>
                   <m:oMathPara xmlns:m="http://schemas.openxmlformats.org/officeDocument/2006/math">
                     <m:oMathParaPr>
@@ -6729,7 +6731,7 @@
             </p:txBody>
           </p:sp>
         </mc:Choice>
-        <mc:Fallback>
+        <mc:Fallback xmlns="">
           <p:sp>
             <p:nvSpPr>
               <p:cNvPr id="9" name="TextBox 8">
@@ -6846,8 +6848,8 @@
           </a:fontRef>
         </p:style>
       </p:cxnSp>
-      <mc:AlternateContent xmlns:mc="http://schemas.openxmlformats.org/markup-compatibility/2006">
-        <mc:Choice xmlns:a14="http://schemas.microsoft.com/office/drawing/2010/main" Requires="a14">
+      <mc:AlternateContent xmlns:mc="http://schemas.openxmlformats.org/markup-compatibility/2006" xmlns:a14="http://schemas.microsoft.com/office/drawing/2010/main">
+        <mc:Choice Requires="a14">
           <p:sp>
             <p:nvSpPr>
               <p:cNvPr id="15" name="TextBox 14">
@@ -6895,7 +6897,7 @@
             </p:txBody>
           </p:sp>
         </mc:Choice>
-        <mc:Fallback>
+        <mc:Fallback xmlns="">
           <p:sp>
             <p:nvSpPr>
               <p:cNvPr id="15" name="TextBox 14">
@@ -6940,8 +6942,8 @@
           </p:sp>
         </mc:Fallback>
       </mc:AlternateContent>
-      <mc:AlternateContent xmlns:mc="http://schemas.openxmlformats.org/markup-compatibility/2006">
-        <mc:Choice xmlns:a14="http://schemas.microsoft.com/office/drawing/2010/main" Requires="a14">
+      <mc:AlternateContent xmlns:mc="http://schemas.openxmlformats.org/markup-compatibility/2006" xmlns:a14="http://schemas.microsoft.com/office/drawing/2010/main">
+        <mc:Choice Requires="a14">
           <p:sp>
             <p:nvSpPr>
               <p:cNvPr id="16" name="TextBox 15">
@@ -6989,7 +6991,7 @@
             </p:txBody>
           </p:sp>
         </mc:Choice>
-        <mc:Fallback>
+        <mc:Fallback xmlns="">
           <p:sp>
             <p:nvSpPr>
               <p:cNvPr id="16" name="TextBox 15">
@@ -7034,8 +7036,8 @@
           </p:sp>
         </mc:Fallback>
       </mc:AlternateContent>
-      <mc:AlternateContent xmlns:mc="http://schemas.openxmlformats.org/markup-compatibility/2006">
-        <mc:Choice xmlns:a14="http://schemas.microsoft.com/office/drawing/2010/main" Requires="a14">
+      <mc:AlternateContent xmlns:mc="http://schemas.openxmlformats.org/markup-compatibility/2006" xmlns:a14="http://schemas.microsoft.com/office/drawing/2010/main">
+        <mc:Choice Requires="a14">
           <p:sp>
             <p:nvSpPr>
               <p:cNvPr id="17" name="TextBox 16">
@@ -7064,6 +7066,7 @@
               </a:bodyPr>
               <a:lstStyle/>
               <a:p>
+                <a:pPr/>
                 <a14:m>
                   <m:oMathPara xmlns:m="http://schemas.openxmlformats.org/officeDocument/2006/math">
                     <m:oMathParaPr>
@@ -7103,7 +7106,7 @@
             </p:txBody>
           </p:sp>
         </mc:Choice>
-        <mc:Fallback>
+        <mc:Fallback xmlns="">
           <p:sp>
             <p:nvSpPr>
               <p:cNvPr id="17" name="TextBox 16">
@@ -7148,8 +7151,8 @@
           </p:sp>
         </mc:Fallback>
       </mc:AlternateContent>
-      <mc:AlternateContent xmlns:mc="http://schemas.openxmlformats.org/markup-compatibility/2006">
-        <mc:Choice xmlns:a14="http://schemas.microsoft.com/office/drawing/2010/main" Requires="a14">
+      <mc:AlternateContent xmlns:mc="http://schemas.openxmlformats.org/markup-compatibility/2006" xmlns:a14="http://schemas.microsoft.com/office/drawing/2010/main">
+        <mc:Choice Requires="a14">
           <p:sp>
             <p:nvSpPr>
               <p:cNvPr id="18" name="TextBox 17">
@@ -7178,6 +7181,7 @@
               </a:bodyPr>
               <a:lstStyle/>
               <a:p>
+                <a:pPr/>
                 <a14:m>
                   <m:oMathPara xmlns:m="http://schemas.openxmlformats.org/officeDocument/2006/math">
                     <m:oMathParaPr>
@@ -7217,7 +7221,7 @@
             </p:txBody>
           </p:sp>
         </mc:Choice>
-        <mc:Fallback>
+        <mc:Fallback xmlns="">
           <p:sp>
             <p:nvSpPr>
               <p:cNvPr id="18" name="TextBox 17">
@@ -7262,8 +7266,8 @@
           </p:sp>
         </mc:Fallback>
       </mc:AlternateContent>
-      <mc:AlternateContent xmlns:mc="http://schemas.openxmlformats.org/markup-compatibility/2006">
-        <mc:Choice xmlns:a14="http://schemas.microsoft.com/office/drawing/2010/main" Requires="a14">
+      <mc:AlternateContent xmlns:mc="http://schemas.openxmlformats.org/markup-compatibility/2006" xmlns:a14="http://schemas.microsoft.com/office/drawing/2010/main">
+        <mc:Choice Requires="a14">
           <p:sp>
             <p:nvSpPr>
               <p:cNvPr id="19" name="TextBox 18">
@@ -7292,6 +7296,7 @@
               </a:bodyPr>
               <a:lstStyle/>
               <a:p>
+                <a:pPr/>
                 <a14:m>
                   <m:oMathPara xmlns:m="http://schemas.openxmlformats.org/officeDocument/2006/math">
                     <m:oMathParaPr>
@@ -7427,7 +7432,7 @@
             </p:txBody>
           </p:sp>
         </mc:Choice>
-        <mc:Fallback>
+        <mc:Fallback xmlns="">
           <p:sp>
             <p:nvSpPr>
               <p:cNvPr id="19" name="TextBox 18">
@@ -7720,8 +7725,8 @@
           </a:fontRef>
         </p:style>
       </p:cxnSp>
-      <mc:AlternateContent xmlns:mc="http://schemas.openxmlformats.org/markup-compatibility/2006">
-        <mc:Choice xmlns:a14="http://schemas.microsoft.com/office/drawing/2010/main" Requires="a14">
+      <mc:AlternateContent xmlns:mc="http://schemas.openxmlformats.org/markup-compatibility/2006" xmlns:a14="http://schemas.microsoft.com/office/drawing/2010/main">
+        <mc:Choice Requires="a14">
           <p:sp>
             <p:nvSpPr>
               <p:cNvPr id="27" name="TextBox 26">
@@ -7769,7 +7774,7 @@
             </p:txBody>
           </p:sp>
         </mc:Choice>
-        <mc:Fallback>
+        <mc:Fallback xmlns="">
           <p:sp>
             <p:nvSpPr>
               <p:cNvPr id="27" name="TextBox 26">
@@ -7814,8 +7819,8 @@
           </p:sp>
         </mc:Fallback>
       </mc:AlternateContent>
-      <mc:AlternateContent xmlns:mc="http://schemas.openxmlformats.org/markup-compatibility/2006">
-        <mc:Choice xmlns:a14="http://schemas.microsoft.com/office/drawing/2010/main" Requires="a14">
+      <mc:AlternateContent xmlns:mc="http://schemas.openxmlformats.org/markup-compatibility/2006" xmlns:a14="http://schemas.microsoft.com/office/drawing/2010/main">
+        <mc:Choice Requires="a14">
           <p:sp>
             <p:nvSpPr>
               <p:cNvPr id="28" name="TextBox 27">
@@ -7863,7 +7868,7 @@
             </p:txBody>
           </p:sp>
         </mc:Choice>
-        <mc:Fallback>
+        <mc:Fallback xmlns="">
           <p:sp>
             <p:nvSpPr>
               <p:cNvPr id="28" name="TextBox 27">
@@ -7908,8 +7913,8 @@
           </p:sp>
         </mc:Fallback>
       </mc:AlternateContent>
-      <mc:AlternateContent xmlns:mc="http://schemas.openxmlformats.org/markup-compatibility/2006">
-        <mc:Choice xmlns:a14="http://schemas.microsoft.com/office/drawing/2010/main" Requires="a14">
+      <mc:AlternateContent xmlns:mc="http://schemas.openxmlformats.org/markup-compatibility/2006" xmlns:a14="http://schemas.microsoft.com/office/drawing/2010/main">
+        <mc:Choice Requires="a14">
           <p:sp>
             <p:nvSpPr>
               <p:cNvPr id="29" name="TextBox 28">
@@ -7938,6 +7943,7 @@
               </a:bodyPr>
               <a:lstStyle/>
               <a:p>
+                <a:pPr/>
                 <a14:m>
                   <m:oMathPara xmlns:m="http://schemas.openxmlformats.org/officeDocument/2006/math">
                     <m:oMathParaPr>
@@ -7977,7 +7983,7 @@
             </p:txBody>
           </p:sp>
         </mc:Choice>
-        <mc:Fallback>
+        <mc:Fallback xmlns="">
           <p:sp>
             <p:nvSpPr>
               <p:cNvPr id="29" name="TextBox 28">
@@ -8022,8 +8028,8 @@
           </p:sp>
         </mc:Fallback>
       </mc:AlternateContent>
-      <mc:AlternateContent xmlns:mc="http://schemas.openxmlformats.org/markup-compatibility/2006">
-        <mc:Choice xmlns:a14="http://schemas.microsoft.com/office/drawing/2010/main" Requires="a14">
+      <mc:AlternateContent xmlns:mc="http://schemas.openxmlformats.org/markup-compatibility/2006" xmlns:a14="http://schemas.microsoft.com/office/drawing/2010/main">
+        <mc:Choice Requires="a14">
           <p:sp>
             <p:nvSpPr>
               <p:cNvPr id="30" name="TextBox 29">
@@ -8052,6 +8058,7 @@
               </a:bodyPr>
               <a:lstStyle/>
               <a:p>
+                <a:pPr/>
                 <a14:m>
                   <m:oMathPara xmlns:m="http://schemas.openxmlformats.org/officeDocument/2006/math">
                     <m:oMathParaPr>
@@ -8091,7 +8098,7 @@
             </p:txBody>
           </p:sp>
         </mc:Choice>
-        <mc:Fallback>
+        <mc:Fallback xmlns="">
           <p:sp>
             <p:nvSpPr>
               <p:cNvPr id="30" name="TextBox 29">
@@ -8136,8 +8143,8 @@
           </p:sp>
         </mc:Fallback>
       </mc:AlternateContent>
-      <mc:AlternateContent xmlns:mc="http://schemas.openxmlformats.org/markup-compatibility/2006">
-        <mc:Choice xmlns:a14="http://schemas.microsoft.com/office/drawing/2010/main" Requires="a14">
+      <mc:AlternateContent xmlns:mc="http://schemas.openxmlformats.org/markup-compatibility/2006" xmlns:a14="http://schemas.microsoft.com/office/drawing/2010/main">
+        <mc:Choice Requires="a14">
           <p:sp>
             <p:nvSpPr>
               <p:cNvPr id="31" name="TextBox 30">
@@ -8166,6 +8173,7 @@
               </a:bodyPr>
               <a:lstStyle/>
               <a:p>
+                <a:pPr/>
                 <a14:m>
                   <m:oMathPara xmlns:m="http://schemas.openxmlformats.org/officeDocument/2006/math">
                     <m:oMathParaPr>
@@ -8301,7 +8309,7 @@
             </p:txBody>
           </p:sp>
         </mc:Choice>
-        <mc:Fallback>
+        <mc:Fallback xmlns="">
           <p:sp>
             <p:nvSpPr>
               <p:cNvPr id="31" name="TextBox 30">
@@ -8346,8 +8354,8 @@
           </p:sp>
         </mc:Fallback>
       </mc:AlternateContent>
-      <mc:AlternateContent xmlns:mc="http://schemas.openxmlformats.org/markup-compatibility/2006">
-        <mc:Choice xmlns:a14="http://schemas.microsoft.com/office/drawing/2010/main" Requires="a14">
+      <mc:AlternateContent xmlns:mc="http://schemas.openxmlformats.org/markup-compatibility/2006" xmlns:a14="http://schemas.microsoft.com/office/drawing/2010/main">
+        <mc:Choice Requires="a14">
           <p:sp>
             <p:nvSpPr>
               <p:cNvPr id="44" name="TextBox 43">
@@ -8376,6 +8384,7 @@
               </a:bodyPr>
               <a:lstStyle/>
               <a:p>
+                <a:pPr/>
                 <a14:m>
                   <m:oMathPara xmlns:m="http://schemas.openxmlformats.org/officeDocument/2006/math">
                     <m:oMathParaPr>
@@ -8446,7 +8455,7 @@
             </p:txBody>
           </p:sp>
         </mc:Choice>
-        <mc:Fallback>
+        <mc:Fallback xmlns="">
           <p:sp>
             <p:nvSpPr>
               <p:cNvPr id="44" name="TextBox 43">
@@ -8491,8 +8500,8 @@
           </p:sp>
         </mc:Fallback>
       </mc:AlternateContent>
-      <mc:AlternateContent xmlns:mc="http://schemas.openxmlformats.org/markup-compatibility/2006">
-        <mc:Choice xmlns:a14="http://schemas.microsoft.com/office/drawing/2010/main" Requires="a14">
+      <mc:AlternateContent xmlns:mc="http://schemas.openxmlformats.org/markup-compatibility/2006" xmlns:a14="http://schemas.microsoft.com/office/drawing/2010/main">
+        <mc:Choice Requires="a14">
           <p:sp>
             <p:nvSpPr>
               <p:cNvPr id="45" name="TextBox 44">
@@ -8521,6 +8530,7 @@
               </a:bodyPr>
               <a:lstStyle/>
               <a:p>
+                <a:pPr/>
                 <a14:m>
                   <m:oMathPara xmlns:m="http://schemas.openxmlformats.org/officeDocument/2006/math">
                     <m:oMathParaPr>
@@ -8572,7 +8582,7 @@
             </p:txBody>
           </p:sp>
         </mc:Choice>
-        <mc:Fallback>
+        <mc:Fallback xmlns="">
           <p:sp>
             <p:nvSpPr>
               <p:cNvPr id="45" name="TextBox 44">
@@ -8784,6 +8794,2607 @@
     <p:extLst>
       <p:ext uri="{BB962C8B-B14F-4D97-AF65-F5344CB8AC3E}">
         <p14:creationId xmlns:p14="http://schemas.microsoft.com/office/powerpoint/2010/main" val="1515307794"/>
+      </p:ext>
+    </p:extLst>
+  </p:cSld>
+  <p:clrMapOvr>
+    <a:masterClrMapping/>
+  </p:clrMapOvr>
+</p:sld>
+</file>
+
+<file path=ppt/slides/slide3.xml><?xml version="1.0" encoding="utf-8"?>
+<p:sld xmlns:a="http://schemas.openxmlformats.org/drawingml/2006/main" xmlns:r="http://schemas.openxmlformats.org/officeDocument/2006/relationships" xmlns:p="http://schemas.openxmlformats.org/presentationml/2006/main">
+  <p:cSld>
+    <p:spTree>
+      <p:nvGrpSpPr>
+        <p:cNvPr id="1" name=""/>
+        <p:cNvGrpSpPr/>
+        <p:nvPr/>
+      </p:nvGrpSpPr>
+      <p:grpSpPr>
+        <a:xfrm>
+          <a:off x="0" y="0"/>
+          <a:ext cx="0" cy="0"/>
+          <a:chOff x="0" y="0"/>
+          <a:chExt cx="0" cy="0"/>
+        </a:xfrm>
+      </p:grpSpPr>
+      <p:sp>
+        <p:nvSpPr>
+          <p:cNvPr id="6" name="TextBox 5">
+            <a:extLst>
+              <a:ext uri="{FF2B5EF4-FFF2-40B4-BE49-F238E27FC236}">
+                <a16:creationId xmlns:a16="http://schemas.microsoft.com/office/drawing/2014/main" id="{83FA0C51-ACF4-2C4B-FEA5-A1E2E9B1BBB0}"/>
+              </a:ext>
+            </a:extLst>
+          </p:cNvPr>
+          <p:cNvSpPr txBox="1"/>
+          <p:nvPr/>
+        </p:nvSpPr>
+        <p:spPr>
+          <a:xfrm>
+            <a:off x="219856" y="127690"/>
+            <a:ext cx="11752288" cy="400110"/>
+          </a:xfrm>
+          <a:prstGeom prst="rect">
+            <a:avLst/>
+          </a:prstGeom>
+          <a:noFill/>
+        </p:spPr>
+        <p:txBody>
+          <a:bodyPr wrap="square" rtlCol="0">
+            <a:spAutoFit/>
+          </a:bodyPr>
+          <a:lstStyle/>
+          <a:p>
+            <a:r>
+              <a:rPr lang="en-US" sz="2000" b="1" dirty="0">
+                <a:solidFill>
+                  <a:srgbClr val="008000"/>
+                </a:solidFill>
+              </a:rPr>
+              <a:t>Cell reaction</a:t>
+            </a:r>
+            <a:r>
+              <a:rPr lang="en-US" sz="2000" dirty="0"/>
+              <a:t>: written assuming that the </a:t>
+            </a:r>
+            <a:r>
+              <a:rPr lang="en-US" sz="2000" dirty="0">
+                <a:solidFill>
+                  <a:srgbClr val="FF0000"/>
+                </a:solidFill>
+              </a:rPr>
+              <a:t>right-hand</a:t>
+            </a:r>
+            <a:r>
+              <a:rPr lang="en-US" sz="2000" dirty="0"/>
+              <a:t> electrode (as it appears in cell diagram) is the </a:t>
+            </a:r>
+            <a:r>
+              <a:rPr lang="en-US" sz="2000" dirty="0">
+                <a:solidFill>
+                  <a:srgbClr val="FF0000"/>
+                </a:solidFill>
+              </a:rPr>
+              <a:t>cathode</a:t>
+            </a:r>
+          </a:p>
+        </p:txBody>
+      </p:sp>
+      <mc:AlternateContent xmlns:mc="http://schemas.openxmlformats.org/markup-compatibility/2006">
+        <mc:Choice xmlns:a14="http://schemas.microsoft.com/office/drawing/2010/main" Requires="a14">
+          <p:sp>
+            <p:nvSpPr>
+              <p:cNvPr id="7" name="TextBox 6">
+                <a:extLst>
+                  <a:ext uri="{FF2B5EF4-FFF2-40B4-BE49-F238E27FC236}">
+                    <a16:creationId xmlns:a16="http://schemas.microsoft.com/office/drawing/2014/main" id="{2DB43038-716E-7C1E-D5D2-CA7EF37C35D0}"/>
+                  </a:ext>
+                </a:extLst>
+              </p:cNvPr>
+              <p:cNvSpPr txBox="1"/>
+              <p:nvPr/>
+            </p:nvSpPr>
+            <p:spPr>
+              <a:xfrm>
+                <a:off x="3640810" y="923994"/>
+                <a:ext cx="5911234" cy="523220"/>
+              </a:xfrm>
+              <a:prstGeom prst="rect">
+                <a:avLst/>
+              </a:prstGeom>
+              <a:noFill/>
+            </p:spPr>
+            <p:txBody>
+              <a:bodyPr wrap="none" rtlCol="0">
+                <a:spAutoFit/>
+              </a:bodyPr>
+              <a:lstStyle/>
+              <a:p>
+                <a:pPr/>
+                <a14:m>
+                  <m:oMathPara xmlns:m="http://schemas.openxmlformats.org/officeDocument/2006/math">
+                    <m:oMathParaPr>
+                      <m:jc m:val="centerGroup"/>
+                    </m:oMathParaPr>
+                    <m:oMath xmlns:m="http://schemas.openxmlformats.org/officeDocument/2006/math">
+                      <m:r>
+                        <a:rPr lang="en-US" sz="2800" i="1">
+                          <a:latin typeface="Cambria Math" panose="02040503050406030204" pitchFamily="18" charset="0"/>
+                        </a:rPr>
+                        <m:t>𝑍𝑛</m:t>
+                      </m:r>
+                      <m:d>
+                        <m:dPr>
+                          <m:ctrlPr>
+                            <a:rPr lang="en-US" sz="2800" i="1">
+                              <a:latin typeface="Cambria Math" panose="02040503050406030204" pitchFamily="18" charset="0"/>
+                            </a:rPr>
+                          </m:ctrlPr>
+                        </m:dPr>
+                        <m:e>
+                          <m:r>
+                            <a:rPr lang="en-US" sz="2800" i="1">
+                              <a:latin typeface="Cambria Math" panose="02040503050406030204" pitchFamily="18" charset="0"/>
+                            </a:rPr>
+                            <m:t>𝑠</m:t>
+                          </m:r>
+                        </m:e>
+                      </m:d>
+                      <m:d>
+                        <m:dPr>
+                          <m:begChr m:val="|"/>
+                          <m:endChr m:val="|"/>
+                          <m:ctrlPr>
+                            <a:rPr lang="en-US" sz="2800" i="1">
+                              <a:latin typeface="Cambria Math" panose="02040503050406030204" pitchFamily="18" charset="0"/>
+                            </a:rPr>
+                          </m:ctrlPr>
+                        </m:dPr>
+                        <m:e>
+                          <m:r>
+                            <a:rPr lang="en-US" sz="2800" i="1">
+                              <a:latin typeface="Cambria Math" panose="02040503050406030204" pitchFamily="18" charset="0"/>
+                            </a:rPr>
+                            <m:t>𝑍𝑛𝑆</m:t>
+                          </m:r>
+                          <m:sSub>
+                            <m:sSubPr>
+                              <m:ctrlPr>
+                                <a:rPr lang="en-US" sz="2800" i="1">
+                                  <a:latin typeface="Cambria Math" panose="02040503050406030204" pitchFamily="18" charset="0"/>
+                                </a:rPr>
+                              </m:ctrlPr>
+                            </m:sSubPr>
+                            <m:e>
+                              <m:r>
+                                <a:rPr lang="en-US" sz="2800" i="1">
+                                  <a:latin typeface="Cambria Math" panose="02040503050406030204" pitchFamily="18" charset="0"/>
+                                </a:rPr>
+                                <m:t>𝑂</m:t>
+                              </m:r>
+                            </m:e>
+                            <m:sub>
+                              <m:r>
+                                <a:rPr lang="en-US" sz="2800" i="1">
+                                  <a:latin typeface="Cambria Math" panose="02040503050406030204" pitchFamily="18" charset="0"/>
+                                </a:rPr>
+                                <m:t>4</m:t>
+                              </m:r>
+                            </m:sub>
+                          </m:sSub>
+                          <m:d>
+                            <m:dPr>
+                              <m:ctrlPr>
+                                <a:rPr lang="en-US" sz="2800" i="1">
+                                  <a:latin typeface="Cambria Math" panose="02040503050406030204" pitchFamily="18" charset="0"/>
+                                </a:rPr>
+                              </m:ctrlPr>
+                            </m:dPr>
+                            <m:e>
+                              <m:r>
+                                <a:rPr lang="en-US" sz="2800" i="1">
+                                  <a:latin typeface="Cambria Math" panose="02040503050406030204" pitchFamily="18" charset="0"/>
+                                </a:rPr>
+                                <m:t>𝑎𝑞</m:t>
+                              </m:r>
+                            </m:e>
+                          </m:d>
+                        </m:e>
+                      </m:d>
+                      <m:r>
+                        <a:rPr lang="en-US" sz="2800" i="1">
+                          <a:latin typeface="Cambria Math" panose="02040503050406030204" pitchFamily="18" charset="0"/>
+                        </a:rPr>
+                        <m:t>|</m:t>
+                      </m:r>
+                      <m:r>
+                        <a:rPr lang="en-US" sz="2800" i="1">
+                          <a:latin typeface="Cambria Math" panose="02040503050406030204" pitchFamily="18" charset="0"/>
+                        </a:rPr>
+                        <m:t>𝐶𝑢𝑆</m:t>
+                      </m:r>
+                      <m:sSub>
+                        <m:sSubPr>
+                          <m:ctrlPr>
+                            <a:rPr lang="en-US" sz="2800" i="1">
+                              <a:latin typeface="Cambria Math" panose="02040503050406030204" pitchFamily="18" charset="0"/>
+                            </a:rPr>
+                          </m:ctrlPr>
+                        </m:sSubPr>
+                        <m:e>
+                          <m:r>
+                            <a:rPr lang="en-US" sz="2800" i="1">
+                              <a:latin typeface="Cambria Math" panose="02040503050406030204" pitchFamily="18" charset="0"/>
+                            </a:rPr>
+                            <m:t>𝑂</m:t>
+                          </m:r>
+                        </m:e>
+                        <m:sub>
+                          <m:r>
+                            <a:rPr lang="en-US" sz="2800" i="1">
+                              <a:latin typeface="Cambria Math" panose="02040503050406030204" pitchFamily="18" charset="0"/>
+                            </a:rPr>
+                            <m:t>4</m:t>
+                          </m:r>
+                        </m:sub>
+                      </m:sSub>
+                      <m:r>
+                        <a:rPr lang="en-US" sz="2800" i="1">
+                          <a:latin typeface="Cambria Math" panose="02040503050406030204" pitchFamily="18" charset="0"/>
+                        </a:rPr>
+                        <m:t>(</m:t>
+                      </m:r>
+                      <m:r>
+                        <a:rPr lang="en-US" sz="2800" i="1">
+                          <a:latin typeface="Cambria Math" panose="02040503050406030204" pitchFamily="18" charset="0"/>
+                        </a:rPr>
+                        <m:t>𝑎𝑞</m:t>
+                      </m:r>
+                      <m:r>
+                        <a:rPr lang="en-US" sz="2800" i="1">
+                          <a:latin typeface="Cambria Math" panose="02040503050406030204" pitchFamily="18" charset="0"/>
+                        </a:rPr>
+                        <m:t>)|</m:t>
+                      </m:r>
+                      <m:r>
+                        <a:rPr lang="en-US" sz="2800" i="1">
+                          <a:latin typeface="Cambria Math" panose="02040503050406030204" pitchFamily="18" charset="0"/>
+                        </a:rPr>
+                        <m:t>𝐶𝑢</m:t>
+                      </m:r>
+                      <m:r>
+                        <a:rPr lang="en-US" sz="2800" i="1">
+                          <a:latin typeface="Cambria Math" panose="02040503050406030204" pitchFamily="18" charset="0"/>
+                        </a:rPr>
+                        <m:t>(</m:t>
+                      </m:r>
+                      <m:r>
+                        <a:rPr lang="en-US" sz="2800" i="1">
+                          <a:latin typeface="Cambria Math" panose="02040503050406030204" pitchFamily="18" charset="0"/>
+                        </a:rPr>
+                        <m:t>𝑠</m:t>
+                      </m:r>
+                      <m:r>
+                        <a:rPr lang="en-US" sz="2800" i="1">
+                          <a:latin typeface="Cambria Math" panose="02040503050406030204" pitchFamily="18" charset="0"/>
+                        </a:rPr>
+                        <m:t>)</m:t>
+                      </m:r>
+                    </m:oMath>
+                  </m:oMathPara>
+                </a14:m>
+                <a:endParaRPr lang="en-US" sz="2800" dirty="0"/>
+              </a:p>
+            </p:txBody>
+          </p:sp>
+        </mc:Choice>
+        <mc:Fallback>
+          <p:sp>
+            <p:nvSpPr>
+              <p:cNvPr id="7" name="TextBox 6">
+                <a:extLst>
+                  <a:ext uri="{FF2B5EF4-FFF2-40B4-BE49-F238E27FC236}">
+                    <a16:creationId xmlns:a16="http://schemas.microsoft.com/office/drawing/2014/main" id="{2DB43038-716E-7C1E-D5D2-CA7EF37C35D0}"/>
+                  </a:ext>
+                </a:extLst>
+              </p:cNvPr>
+              <p:cNvSpPr txBox="1">
+                <a:spLocks noRot="1" noChangeAspect="1" noMove="1" noResize="1" noEditPoints="1" noAdjustHandles="1" noChangeArrowheads="1" noChangeShapeType="1" noTextEdit="1"/>
+              </p:cNvSpPr>
+              <p:nvPr/>
+            </p:nvSpPr>
+            <p:spPr>
+              <a:xfrm>
+                <a:off x="3640810" y="923994"/>
+                <a:ext cx="5911234" cy="523220"/>
+              </a:xfrm>
+              <a:prstGeom prst="rect">
+                <a:avLst/>
+              </a:prstGeom>
+              <a:blipFill>
+                <a:blip r:embed="rId2"/>
+                <a:stretch>
+                  <a:fillRect/>
+                </a:stretch>
+              </a:blipFill>
+            </p:spPr>
+            <p:txBody>
+              <a:bodyPr/>
+              <a:lstStyle/>
+              <a:p>
+                <a:r>
+                  <a:rPr lang="en-US">
+                    <a:noFill/>
+                  </a:rPr>
+                  <a:t> </a:t>
+                </a:r>
+              </a:p>
+            </p:txBody>
+          </p:sp>
+        </mc:Fallback>
+      </mc:AlternateContent>
+      <p:sp>
+        <p:nvSpPr>
+          <p:cNvPr id="8" name="TextBox 7">
+            <a:extLst>
+              <a:ext uri="{FF2B5EF4-FFF2-40B4-BE49-F238E27FC236}">
+                <a16:creationId xmlns:a16="http://schemas.microsoft.com/office/drawing/2014/main" id="{A9AC5847-A1F8-AD6F-78D0-45572B6D80F8}"/>
+              </a:ext>
+            </a:extLst>
+          </p:cNvPr>
+          <p:cNvSpPr txBox="1"/>
+          <p:nvPr/>
+        </p:nvSpPr>
+        <p:spPr>
+          <a:xfrm>
+            <a:off x="443016" y="872958"/>
+            <a:ext cx="2047355" cy="523220"/>
+          </a:xfrm>
+          <a:prstGeom prst="rect">
+            <a:avLst/>
+          </a:prstGeom>
+          <a:noFill/>
+        </p:spPr>
+        <p:txBody>
+          <a:bodyPr wrap="none" rtlCol="0">
+            <a:spAutoFit/>
+          </a:bodyPr>
+          <a:lstStyle/>
+          <a:p>
+            <a:r>
+              <a:rPr lang="en-US" sz="2800" dirty="0"/>
+              <a:t>This means:</a:t>
+            </a:r>
+          </a:p>
+        </p:txBody>
+      </p:sp>
+      <p:sp>
+        <p:nvSpPr>
+          <p:cNvPr id="9" name="Right Brace 8">
+            <a:extLst>
+              <a:ext uri="{FF2B5EF4-FFF2-40B4-BE49-F238E27FC236}">
+                <a16:creationId xmlns:a16="http://schemas.microsoft.com/office/drawing/2014/main" id="{C1EA19BB-B7E5-AB7F-6FFD-3AF6EB99AF04}"/>
+              </a:ext>
+            </a:extLst>
+          </p:cNvPr>
+          <p:cNvSpPr/>
+          <p:nvPr/>
+        </p:nvSpPr>
+        <p:spPr>
+          <a:xfrm rot="5400000">
+            <a:off x="7958468" y="305607"/>
+            <a:ext cx="342876" cy="2732726"/>
+          </a:xfrm>
+          <a:prstGeom prst="rightBrace">
+            <a:avLst>
+              <a:gd name="adj1" fmla="val 151737"/>
+              <a:gd name="adj2" fmla="val 50000"/>
+            </a:avLst>
+          </a:prstGeom>
+          <a:ln w="63500">
+            <a:solidFill>
+              <a:srgbClr val="FF0000"/>
+            </a:solidFill>
+          </a:ln>
+        </p:spPr>
+        <p:style>
+          <a:lnRef idx="1">
+            <a:schemeClr val="accent1"/>
+          </a:lnRef>
+          <a:fillRef idx="0">
+            <a:schemeClr val="accent1"/>
+          </a:fillRef>
+          <a:effectRef idx="0">
+            <a:schemeClr val="accent1"/>
+          </a:effectRef>
+          <a:fontRef idx="minor">
+            <a:schemeClr val="tx1"/>
+          </a:fontRef>
+        </p:style>
+        <p:txBody>
+          <a:bodyPr rtlCol="0" anchor="ctr"/>
+          <a:lstStyle/>
+          <a:p>
+            <a:pPr algn="ctr"/>
+            <a:endParaRPr lang="en-US" sz="2800"/>
+          </a:p>
+        </p:txBody>
+      </p:sp>
+      <p:sp>
+        <p:nvSpPr>
+          <p:cNvPr id="10" name="TextBox 9">
+            <a:extLst>
+              <a:ext uri="{FF2B5EF4-FFF2-40B4-BE49-F238E27FC236}">
+                <a16:creationId xmlns:a16="http://schemas.microsoft.com/office/drawing/2014/main" id="{AEA8DC0D-0DC5-58AB-8EF7-A3DC6DDE4C7E}"/>
+              </a:ext>
+            </a:extLst>
+          </p:cNvPr>
+          <p:cNvSpPr txBox="1"/>
+          <p:nvPr/>
+        </p:nvSpPr>
+        <p:spPr>
+          <a:xfrm>
+            <a:off x="6596427" y="1802250"/>
+            <a:ext cx="3403560" cy="523220"/>
+          </a:xfrm>
+          <a:prstGeom prst="rect">
+            <a:avLst/>
+          </a:prstGeom>
+          <a:noFill/>
+        </p:spPr>
+        <p:txBody>
+          <a:bodyPr wrap="none" rtlCol="0">
+            <a:spAutoFit/>
+          </a:bodyPr>
+          <a:lstStyle/>
+          <a:p>
+            <a:r>
+              <a:rPr lang="en-US" sz="2800" dirty="0">
+                <a:solidFill>
+                  <a:srgbClr val="FF0000"/>
+                </a:solidFill>
+              </a:rPr>
+              <a:t>Reduction (Cathode)</a:t>
+            </a:r>
+          </a:p>
+        </p:txBody>
+      </p:sp>
+      <p:sp>
+        <p:nvSpPr>
+          <p:cNvPr id="11" name="Right Brace 10">
+            <a:extLst>
+              <a:ext uri="{FF2B5EF4-FFF2-40B4-BE49-F238E27FC236}">
+                <a16:creationId xmlns:a16="http://schemas.microsoft.com/office/drawing/2014/main" id="{A4607AC7-846C-FC66-F3C8-306E46925EAD}"/>
+              </a:ext>
+            </a:extLst>
+          </p:cNvPr>
+          <p:cNvSpPr/>
+          <p:nvPr/>
+        </p:nvSpPr>
+        <p:spPr>
+          <a:xfrm rot="5400000">
+            <a:off x="4930904" y="308835"/>
+            <a:ext cx="342876" cy="2718950"/>
+          </a:xfrm>
+          <a:prstGeom prst="rightBrace">
+            <a:avLst>
+              <a:gd name="adj1" fmla="val 151737"/>
+              <a:gd name="adj2" fmla="val 50000"/>
+            </a:avLst>
+          </a:prstGeom>
+          <a:ln w="63500">
+            <a:solidFill>
+              <a:srgbClr val="0000FF"/>
+            </a:solidFill>
+          </a:ln>
+        </p:spPr>
+        <p:style>
+          <a:lnRef idx="1">
+            <a:schemeClr val="accent1"/>
+          </a:lnRef>
+          <a:fillRef idx="0">
+            <a:schemeClr val="accent1"/>
+          </a:fillRef>
+          <a:effectRef idx="0">
+            <a:schemeClr val="accent1"/>
+          </a:effectRef>
+          <a:fontRef idx="minor">
+            <a:schemeClr val="tx1"/>
+          </a:fontRef>
+        </p:style>
+        <p:txBody>
+          <a:bodyPr rtlCol="0" anchor="ctr"/>
+          <a:lstStyle/>
+          <a:p>
+            <a:pPr algn="ctr"/>
+            <a:endParaRPr lang="en-US" sz="2800"/>
+          </a:p>
+        </p:txBody>
+      </p:sp>
+      <p:sp>
+        <p:nvSpPr>
+          <p:cNvPr id="12" name="TextBox 11">
+            <a:extLst>
+              <a:ext uri="{FF2B5EF4-FFF2-40B4-BE49-F238E27FC236}">
+                <a16:creationId xmlns:a16="http://schemas.microsoft.com/office/drawing/2014/main" id="{0087040E-DDCE-75D7-7E40-DACB48B23CA5}"/>
+              </a:ext>
+            </a:extLst>
+          </p:cNvPr>
+          <p:cNvSpPr txBox="1"/>
+          <p:nvPr/>
+        </p:nvSpPr>
+        <p:spPr>
+          <a:xfrm>
+            <a:off x="3622225" y="1849916"/>
+            <a:ext cx="2960234" cy="523220"/>
+          </a:xfrm>
+          <a:prstGeom prst="rect">
+            <a:avLst/>
+          </a:prstGeom>
+          <a:noFill/>
+        </p:spPr>
+        <p:txBody>
+          <a:bodyPr wrap="none" rtlCol="0">
+            <a:spAutoFit/>
+          </a:bodyPr>
+          <a:lstStyle/>
+          <a:p>
+            <a:r>
+              <a:rPr lang="en-US" sz="2800" dirty="0">
+                <a:solidFill>
+                  <a:srgbClr val="0000FF"/>
+                </a:solidFill>
+              </a:rPr>
+              <a:t>Oxidation (Anode)</a:t>
+            </a:r>
+          </a:p>
+        </p:txBody>
+      </p:sp>
+      <mc:AlternateContent xmlns:mc="http://schemas.openxmlformats.org/markup-compatibility/2006">
+        <mc:Choice xmlns:a14="http://schemas.microsoft.com/office/drawing/2010/main" Requires="a14">
+          <p:sp>
+            <p:nvSpPr>
+              <p:cNvPr id="13" name="TextBox 12">
+                <a:extLst>
+                  <a:ext uri="{FF2B5EF4-FFF2-40B4-BE49-F238E27FC236}">
+                    <a16:creationId xmlns:a16="http://schemas.microsoft.com/office/drawing/2014/main" id="{E9FD3DA9-0278-E7E5-7982-CA2D0E205C09}"/>
+                  </a:ext>
+                </a:extLst>
+              </p:cNvPr>
+              <p:cNvSpPr txBox="1"/>
+              <p:nvPr/>
+            </p:nvSpPr>
+            <p:spPr>
+              <a:xfrm>
+                <a:off x="2455717" y="2410059"/>
+                <a:ext cx="4181080" cy="523220"/>
+              </a:xfrm>
+              <a:prstGeom prst="rect">
+                <a:avLst/>
+              </a:prstGeom>
+              <a:noFill/>
+            </p:spPr>
+            <p:txBody>
+              <a:bodyPr wrap="none" rtlCol="0">
+                <a:spAutoFit/>
+              </a:bodyPr>
+              <a:lstStyle/>
+              <a:p>
+                <a:pPr/>
+                <a14:m>
+                  <m:oMathPara xmlns:m="http://schemas.openxmlformats.org/officeDocument/2006/math">
+                    <m:oMathParaPr>
+                      <m:jc m:val="centerGroup"/>
+                    </m:oMathParaPr>
+                    <m:oMath xmlns:m="http://schemas.openxmlformats.org/officeDocument/2006/math">
+                      <m:r>
+                        <a:rPr lang="en-US" sz="2800" i="1">
+                          <a:solidFill>
+                            <a:srgbClr val="0000FF"/>
+                          </a:solidFill>
+                          <a:latin typeface="Cambria Math" panose="02040503050406030204" pitchFamily="18" charset="0"/>
+                        </a:rPr>
+                        <m:t>𝑍𝑛</m:t>
+                      </m:r>
+                      <m:d>
+                        <m:dPr>
+                          <m:ctrlPr>
+                            <a:rPr lang="en-US" sz="2800" i="1">
+                              <a:solidFill>
+                                <a:srgbClr val="0000FF"/>
+                              </a:solidFill>
+                              <a:latin typeface="Cambria Math" panose="02040503050406030204" pitchFamily="18" charset="0"/>
+                            </a:rPr>
+                          </m:ctrlPr>
+                        </m:dPr>
+                        <m:e>
+                          <m:r>
+                            <a:rPr lang="en-US" sz="2800" i="1">
+                              <a:solidFill>
+                                <a:srgbClr val="0000FF"/>
+                              </a:solidFill>
+                              <a:latin typeface="Cambria Math" panose="02040503050406030204" pitchFamily="18" charset="0"/>
+                            </a:rPr>
+                            <m:t>𝑠</m:t>
+                          </m:r>
+                        </m:e>
+                      </m:d>
+                      <m:r>
+                        <a:rPr lang="en-US" sz="2800" i="1">
+                          <a:solidFill>
+                            <a:srgbClr val="0000FF"/>
+                          </a:solidFill>
+                          <a:latin typeface="Cambria Math" panose="02040503050406030204" pitchFamily="18" charset="0"/>
+                        </a:rPr>
+                        <m:t>−2</m:t>
+                      </m:r>
+                      <m:sSup>
+                        <m:sSupPr>
+                          <m:ctrlPr>
+                            <a:rPr lang="en-US" sz="2800" i="1">
+                              <a:solidFill>
+                                <a:srgbClr val="0000FF"/>
+                              </a:solidFill>
+                              <a:latin typeface="Cambria Math" panose="02040503050406030204" pitchFamily="18" charset="0"/>
+                            </a:rPr>
+                          </m:ctrlPr>
+                        </m:sSupPr>
+                        <m:e>
+                          <m:r>
+                            <a:rPr lang="en-US" sz="2800" i="1">
+                              <a:solidFill>
+                                <a:srgbClr val="0000FF"/>
+                              </a:solidFill>
+                              <a:latin typeface="Cambria Math" panose="02040503050406030204" pitchFamily="18" charset="0"/>
+                            </a:rPr>
+                            <m:t>𝑒</m:t>
+                          </m:r>
+                        </m:e>
+                        <m:sup>
+                          <m:r>
+                            <a:rPr lang="en-US" sz="2800" i="1">
+                              <a:solidFill>
+                                <a:srgbClr val="0000FF"/>
+                              </a:solidFill>
+                              <a:latin typeface="Cambria Math" panose="02040503050406030204" pitchFamily="18" charset="0"/>
+                            </a:rPr>
+                            <m:t>−</m:t>
+                          </m:r>
+                        </m:sup>
+                      </m:sSup>
+                      <m:r>
+                        <a:rPr lang="en-US" sz="2800" i="1">
+                          <a:solidFill>
+                            <a:srgbClr val="0000FF"/>
+                          </a:solidFill>
+                          <a:latin typeface="Cambria Math" panose="02040503050406030204" pitchFamily="18" charset="0"/>
+                        </a:rPr>
+                        <m:t>→</m:t>
+                      </m:r>
+                      <m:r>
+                        <a:rPr lang="en-US" sz="2800" i="1">
+                          <a:solidFill>
+                            <a:srgbClr val="0000FF"/>
+                          </a:solidFill>
+                          <a:latin typeface="Cambria Math" panose="02040503050406030204" pitchFamily="18" charset="0"/>
+                        </a:rPr>
+                        <m:t>𝑍</m:t>
+                      </m:r>
+                      <m:sSup>
+                        <m:sSupPr>
+                          <m:ctrlPr>
+                            <a:rPr lang="en-US" sz="2800" i="1">
+                              <a:solidFill>
+                                <a:srgbClr val="0000FF"/>
+                              </a:solidFill>
+                              <a:latin typeface="Cambria Math" panose="02040503050406030204" pitchFamily="18" charset="0"/>
+                            </a:rPr>
+                          </m:ctrlPr>
+                        </m:sSupPr>
+                        <m:e>
+                          <m:r>
+                            <a:rPr lang="en-US" sz="2800" i="1">
+                              <a:solidFill>
+                                <a:srgbClr val="0000FF"/>
+                              </a:solidFill>
+                              <a:latin typeface="Cambria Math" panose="02040503050406030204" pitchFamily="18" charset="0"/>
+                            </a:rPr>
+                            <m:t>𝑛</m:t>
+                          </m:r>
+                        </m:e>
+                        <m:sup>
+                          <m:r>
+                            <a:rPr lang="en-US" sz="2800" i="1">
+                              <a:solidFill>
+                                <a:srgbClr val="0000FF"/>
+                              </a:solidFill>
+                              <a:latin typeface="Cambria Math" panose="02040503050406030204" pitchFamily="18" charset="0"/>
+                            </a:rPr>
+                            <m:t>2+</m:t>
+                          </m:r>
+                        </m:sup>
+                      </m:sSup>
+                      <m:r>
+                        <a:rPr lang="en-US" sz="2800" i="1">
+                          <a:solidFill>
+                            <a:srgbClr val="0000FF"/>
+                          </a:solidFill>
+                          <a:latin typeface="Cambria Math" panose="02040503050406030204" pitchFamily="18" charset="0"/>
+                        </a:rPr>
+                        <m:t>(</m:t>
+                      </m:r>
+                      <m:r>
+                        <a:rPr lang="en-US" sz="2800" i="1">
+                          <a:solidFill>
+                            <a:srgbClr val="0000FF"/>
+                          </a:solidFill>
+                          <a:latin typeface="Cambria Math" panose="02040503050406030204" pitchFamily="18" charset="0"/>
+                        </a:rPr>
+                        <m:t>𝑎𝑞</m:t>
+                      </m:r>
+                      <m:r>
+                        <a:rPr lang="en-US" sz="2800" i="1">
+                          <a:solidFill>
+                            <a:srgbClr val="0000FF"/>
+                          </a:solidFill>
+                          <a:latin typeface="Cambria Math" panose="02040503050406030204" pitchFamily="18" charset="0"/>
+                        </a:rPr>
+                        <m:t>)</m:t>
+                      </m:r>
+                    </m:oMath>
+                  </m:oMathPara>
+                </a14:m>
+                <a:endParaRPr lang="en-US" sz="2800" dirty="0">
+                  <a:solidFill>
+                    <a:srgbClr val="0000FF"/>
+                  </a:solidFill>
+                </a:endParaRPr>
+              </a:p>
+            </p:txBody>
+          </p:sp>
+        </mc:Choice>
+        <mc:Fallback>
+          <p:sp>
+            <p:nvSpPr>
+              <p:cNvPr id="13" name="TextBox 12">
+                <a:extLst>
+                  <a:ext uri="{FF2B5EF4-FFF2-40B4-BE49-F238E27FC236}">
+                    <a16:creationId xmlns:a16="http://schemas.microsoft.com/office/drawing/2014/main" id="{E9FD3DA9-0278-E7E5-7982-CA2D0E205C09}"/>
+                  </a:ext>
+                </a:extLst>
+              </p:cNvPr>
+              <p:cNvSpPr txBox="1">
+                <a:spLocks noRot="1" noChangeAspect="1" noMove="1" noResize="1" noEditPoints="1" noAdjustHandles="1" noChangeArrowheads="1" noChangeShapeType="1" noTextEdit="1"/>
+              </p:cNvSpPr>
+              <p:nvPr/>
+            </p:nvSpPr>
+            <p:spPr>
+              <a:xfrm>
+                <a:off x="2455717" y="2410059"/>
+                <a:ext cx="4181080" cy="523220"/>
+              </a:xfrm>
+              <a:prstGeom prst="rect">
+                <a:avLst/>
+              </a:prstGeom>
+              <a:blipFill>
+                <a:blip r:embed="rId3"/>
+                <a:stretch>
+                  <a:fillRect/>
+                </a:stretch>
+              </a:blipFill>
+            </p:spPr>
+            <p:txBody>
+              <a:bodyPr/>
+              <a:lstStyle/>
+              <a:p>
+                <a:r>
+                  <a:rPr lang="en-US">
+                    <a:noFill/>
+                  </a:rPr>
+                  <a:t> </a:t>
+                </a:r>
+              </a:p>
+            </p:txBody>
+          </p:sp>
+        </mc:Fallback>
+      </mc:AlternateContent>
+      <mc:AlternateContent xmlns:mc="http://schemas.openxmlformats.org/markup-compatibility/2006">
+        <mc:Choice xmlns:a14="http://schemas.microsoft.com/office/drawing/2010/main" Requires="a14">
+          <p:sp>
+            <p:nvSpPr>
+              <p:cNvPr id="14" name="TextBox 13">
+                <a:extLst>
+                  <a:ext uri="{FF2B5EF4-FFF2-40B4-BE49-F238E27FC236}">
+                    <a16:creationId xmlns:a16="http://schemas.microsoft.com/office/drawing/2014/main" id="{F6DB9CAF-9CE5-C9DF-467D-14651B05B567}"/>
+                  </a:ext>
+                </a:extLst>
+              </p:cNvPr>
+              <p:cNvSpPr txBox="1"/>
+              <p:nvPr/>
+            </p:nvSpPr>
+            <p:spPr>
+              <a:xfrm>
+                <a:off x="6721934" y="2406228"/>
+                <a:ext cx="4275721" cy="523220"/>
+              </a:xfrm>
+              <a:prstGeom prst="rect">
+                <a:avLst/>
+              </a:prstGeom>
+              <a:noFill/>
+            </p:spPr>
+            <p:txBody>
+              <a:bodyPr wrap="none" rtlCol="0">
+                <a:spAutoFit/>
+              </a:bodyPr>
+              <a:lstStyle/>
+              <a:p>
+                <a:pPr/>
+                <a14:m>
+                  <m:oMathPara xmlns:m="http://schemas.openxmlformats.org/officeDocument/2006/math">
+                    <m:oMathParaPr>
+                      <m:jc m:val="centerGroup"/>
+                    </m:oMathParaPr>
+                    <m:oMath xmlns:m="http://schemas.openxmlformats.org/officeDocument/2006/math">
+                      <m:r>
+                        <a:rPr lang="en-US" sz="2800" i="1">
+                          <a:solidFill>
+                            <a:srgbClr val="FF0000"/>
+                          </a:solidFill>
+                          <a:latin typeface="Cambria Math" panose="02040503050406030204" pitchFamily="18" charset="0"/>
+                        </a:rPr>
+                        <m:t>𝐶</m:t>
+                      </m:r>
+                      <m:sSup>
+                        <m:sSupPr>
+                          <m:ctrlPr>
+                            <a:rPr lang="en-US" sz="2800" i="1">
+                              <a:solidFill>
+                                <a:srgbClr val="FF0000"/>
+                              </a:solidFill>
+                              <a:latin typeface="Cambria Math" panose="02040503050406030204" pitchFamily="18" charset="0"/>
+                            </a:rPr>
+                          </m:ctrlPr>
+                        </m:sSupPr>
+                        <m:e>
+                          <m:r>
+                            <a:rPr lang="en-US" sz="2800" i="1">
+                              <a:solidFill>
+                                <a:srgbClr val="FF0000"/>
+                              </a:solidFill>
+                              <a:latin typeface="Cambria Math" panose="02040503050406030204" pitchFamily="18" charset="0"/>
+                            </a:rPr>
+                            <m:t>𝑢</m:t>
+                          </m:r>
+                        </m:e>
+                        <m:sup>
+                          <m:r>
+                            <a:rPr lang="en-US" sz="2800" i="1">
+                              <a:solidFill>
+                                <a:srgbClr val="FF0000"/>
+                              </a:solidFill>
+                              <a:latin typeface="Cambria Math" panose="02040503050406030204" pitchFamily="18" charset="0"/>
+                            </a:rPr>
+                            <m:t>2+</m:t>
+                          </m:r>
+                        </m:sup>
+                      </m:sSup>
+                      <m:d>
+                        <m:dPr>
+                          <m:ctrlPr>
+                            <a:rPr lang="en-US" sz="2800" i="1">
+                              <a:solidFill>
+                                <a:srgbClr val="FF0000"/>
+                              </a:solidFill>
+                              <a:latin typeface="Cambria Math" panose="02040503050406030204" pitchFamily="18" charset="0"/>
+                            </a:rPr>
+                          </m:ctrlPr>
+                        </m:dPr>
+                        <m:e>
+                          <m:r>
+                            <a:rPr lang="en-US" sz="2800" i="1">
+                              <a:solidFill>
+                                <a:srgbClr val="FF0000"/>
+                              </a:solidFill>
+                              <a:latin typeface="Cambria Math" panose="02040503050406030204" pitchFamily="18" charset="0"/>
+                            </a:rPr>
+                            <m:t>𝑎𝑞</m:t>
+                          </m:r>
+                        </m:e>
+                      </m:d>
+                      <m:r>
+                        <a:rPr lang="en-US" sz="2800" i="1">
+                          <a:solidFill>
+                            <a:srgbClr val="FF0000"/>
+                          </a:solidFill>
+                          <a:latin typeface="Cambria Math" panose="02040503050406030204" pitchFamily="18" charset="0"/>
+                        </a:rPr>
+                        <m:t>+2</m:t>
+                      </m:r>
+                      <m:sSup>
+                        <m:sSupPr>
+                          <m:ctrlPr>
+                            <a:rPr lang="en-US" sz="2800" i="1">
+                              <a:solidFill>
+                                <a:srgbClr val="FF0000"/>
+                              </a:solidFill>
+                              <a:latin typeface="Cambria Math" panose="02040503050406030204" pitchFamily="18" charset="0"/>
+                            </a:rPr>
+                          </m:ctrlPr>
+                        </m:sSupPr>
+                        <m:e>
+                          <m:r>
+                            <a:rPr lang="en-US" sz="2800" i="1">
+                              <a:solidFill>
+                                <a:srgbClr val="FF0000"/>
+                              </a:solidFill>
+                              <a:latin typeface="Cambria Math" panose="02040503050406030204" pitchFamily="18" charset="0"/>
+                            </a:rPr>
+                            <m:t>𝑒</m:t>
+                          </m:r>
+                        </m:e>
+                        <m:sup>
+                          <m:r>
+                            <a:rPr lang="en-US" sz="2800" i="1">
+                              <a:solidFill>
+                                <a:srgbClr val="FF0000"/>
+                              </a:solidFill>
+                              <a:latin typeface="Cambria Math" panose="02040503050406030204" pitchFamily="18" charset="0"/>
+                            </a:rPr>
+                            <m:t>−</m:t>
+                          </m:r>
+                        </m:sup>
+                      </m:sSup>
+                      <m:r>
+                        <a:rPr lang="en-US" sz="2800" i="1">
+                          <a:solidFill>
+                            <a:srgbClr val="FF0000"/>
+                          </a:solidFill>
+                          <a:latin typeface="Cambria Math" panose="02040503050406030204" pitchFamily="18" charset="0"/>
+                        </a:rPr>
+                        <m:t>→</m:t>
+                      </m:r>
+                      <m:r>
+                        <a:rPr lang="en-US" sz="2800" i="1">
+                          <a:solidFill>
+                            <a:srgbClr val="FF0000"/>
+                          </a:solidFill>
+                          <a:latin typeface="Cambria Math" panose="02040503050406030204" pitchFamily="18" charset="0"/>
+                        </a:rPr>
+                        <m:t>𝐶𝑢</m:t>
+                      </m:r>
+                      <m:r>
+                        <a:rPr lang="en-US" sz="2800" i="1">
+                          <a:solidFill>
+                            <a:srgbClr val="FF0000"/>
+                          </a:solidFill>
+                          <a:latin typeface="Cambria Math" panose="02040503050406030204" pitchFamily="18" charset="0"/>
+                        </a:rPr>
+                        <m:t> (</m:t>
+                      </m:r>
+                      <m:r>
+                        <a:rPr lang="en-US" sz="2800" i="1">
+                          <a:solidFill>
+                            <a:srgbClr val="FF0000"/>
+                          </a:solidFill>
+                          <a:latin typeface="Cambria Math" panose="02040503050406030204" pitchFamily="18" charset="0"/>
+                        </a:rPr>
+                        <m:t>𝑠</m:t>
+                      </m:r>
+                      <m:r>
+                        <a:rPr lang="en-US" sz="2800" i="1">
+                          <a:solidFill>
+                            <a:srgbClr val="FF0000"/>
+                          </a:solidFill>
+                          <a:latin typeface="Cambria Math" panose="02040503050406030204" pitchFamily="18" charset="0"/>
+                        </a:rPr>
+                        <m:t>)</m:t>
+                      </m:r>
+                    </m:oMath>
+                  </m:oMathPara>
+                </a14:m>
+                <a:endParaRPr lang="en-US" sz="2800" dirty="0">
+                  <a:solidFill>
+                    <a:srgbClr val="FF0000"/>
+                  </a:solidFill>
+                </a:endParaRPr>
+              </a:p>
+            </p:txBody>
+          </p:sp>
+        </mc:Choice>
+        <mc:Fallback>
+          <p:sp>
+            <p:nvSpPr>
+              <p:cNvPr id="14" name="TextBox 13">
+                <a:extLst>
+                  <a:ext uri="{FF2B5EF4-FFF2-40B4-BE49-F238E27FC236}">
+                    <a16:creationId xmlns:a16="http://schemas.microsoft.com/office/drawing/2014/main" id="{F6DB9CAF-9CE5-C9DF-467D-14651B05B567}"/>
+                  </a:ext>
+                </a:extLst>
+              </p:cNvPr>
+              <p:cNvSpPr txBox="1">
+                <a:spLocks noRot="1" noChangeAspect="1" noMove="1" noResize="1" noEditPoints="1" noAdjustHandles="1" noChangeArrowheads="1" noChangeShapeType="1" noTextEdit="1"/>
+              </p:cNvSpPr>
+              <p:nvPr/>
+            </p:nvSpPr>
+            <p:spPr>
+              <a:xfrm>
+                <a:off x="6721934" y="2406228"/>
+                <a:ext cx="4275721" cy="523220"/>
+              </a:xfrm>
+              <a:prstGeom prst="rect">
+                <a:avLst/>
+              </a:prstGeom>
+              <a:blipFill>
+                <a:blip r:embed="rId4"/>
+                <a:stretch>
+                  <a:fillRect/>
+                </a:stretch>
+              </a:blipFill>
+            </p:spPr>
+            <p:txBody>
+              <a:bodyPr/>
+              <a:lstStyle/>
+              <a:p>
+                <a:r>
+                  <a:rPr lang="en-US">
+                    <a:noFill/>
+                  </a:rPr>
+                  <a:t> </a:t>
+                </a:r>
+              </a:p>
+            </p:txBody>
+          </p:sp>
+        </mc:Fallback>
+      </mc:AlternateContent>
+      <mc:AlternateContent xmlns:mc="http://schemas.openxmlformats.org/markup-compatibility/2006">
+        <mc:Choice xmlns:a14="http://schemas.microsoft.com/office/drawing/2010/main" Requires="a14">
+          <p:sp>
+            <p:nvSpPr>
+              <p:cNvPr id="15" name="TextBox 14">
+                <a:extLst>
+                  <a:ext uri="{FF2B5EF4-FFF2-40B4-BE49-F238E27FC236}">
+                    <a16:creationId xmlns:a16="http://schemas.microsoft.com/office/drawing/2014/main" id="{4D7A4307-35FE-DCE4-F6EF-739E6042F49E}"/>
+                  </a:ext>
+                </a:extLst>
+              </p:cNvPr>
+              <p:cNvSpPr txBox="1"/>
+              <p:nvPr/>
+            </p:nvSpPr>
+            <p:spPr>
+              <a:xfrm>
+                <a:off x="3429028" y="3125407"/>
+                <a:ext cx="6415538" cy="523220"/>
+              </a:xfrm>
+              <a:prstGeom prst="rect">
+                <a:avLst/>
+              </a:prstGeom>
+              <a:noFill/>
+            </p:spPr>
+            <p:txBody>
+              <a:bodyPr wrap="none" rtlCol="0">
+                <a:spAutoFit/>
+              </a:bodyPr>
+              <a:lstStyle/>
+              <a:p>
+                <a:pPr/>
+                <a14:m>
+                  <m:oMathPara xmlns:m="http://schemas.openxmlformats.org/officeDocument/2006/math">
+                    <m:oMathParaPr>
+                      <m:jc m:val="centerGroup"/>
+                    </m:oMathParaPr>
+                    <m:oMath xmlns:m="http://schemas.openxmlformats.org/officeDocument/2006/math">
+                      <m:r>
+                        <a:rPr lang="en-US" sz="2800" i="1" smtClean="0">
+                          <a:solidFill>
+                            <a:srgbClr val="008000"/>
+                          </a:solidFill>
+                          <a:latin typeface="Cambria Math" panose="02040503050406030204" pitchFamily="18" charset="0"/>
+                        </a:rPr>
+                        <m:t>𝑍𝑛</m:t>
+                      </m:r>
+                      <m:d>
+                        <m:dPr>
+                          <m:ctrlPr>
+                            <a:rPr lang="en-US" sz="2800" i="1">
+                              <a:solidFill>
+                                <a:srgbClr val="008000"/>
+                              </a:solidFill>
+                              <a:latin typeface="Cambria Math" panose="02040503050406030204" pitchFamily="18" charset="0"/>
+                            </a:rPr>
+                          </m:ctrlPr>
+                        </m:dPr>
+                        <m:e>
+                          <m:r>
+                            <a:rPr lang="en-US" sz="2800" i="1">
+                              <a:solidFill>
+                                <a:srgbClr val="008000"/>
+                              </a:solidFill>
+                              <a:latin typeface="Cambria Math" panose="02040503050406030204" pitchFamily="18" charset="0"/>
+                            </a:rPr>
+                            <m:t>𝑠</m:t>
+                          </m:r>
+                        </m:e>
+                      </m:d>
+                      <m:r>
+                        <a:rPr lang="en-US" sz="2800" i="1">
+                          <a:solidFill>
+                            <a:srgbClr val="008000"/>
+                          </a:solidFill>
+                          <a:latin typeface="Cambria Math" panose="02040503050406030204" pitchFamily="18" charset="0"/>
+                        </a:rPr>
+                        <m:t>+</m:t>
+                      </m:r>
+                      <m:r>
+                        <a:rPr lang="en-US" sz="2800" i="1">
+                          <a:solidFill>
+                            <a:srgbClr val="008000"/>
+                          </a:solidFill>
+                          <a:latin typeface="Cambria Math" panose="02040503050406030204" pitchFamily="18" charset="0"/>
+                        </a:rPr>
+                        <m:t>𝐶</m:t>
+                      </m:r>
+                      <m:sSup>
+                        <m:sSupPr>
+                          <m:ctrlPr>
+                            <a:rPr lang="en-US" sz="2800" i="1">
+                              <a:solidFill>
+                                <a:srgbClr val="008000"/>
+                              </a:solidFill>
+                              <a:latin typeface="Cambria Math" panose="02040503050406030204" pitchFamily="18" charset="0"/>
+                            </a:rPr>
+                          </m:ctrlPr>
+                        </m:sSupPr>
+                        <m:e>
+                          <m:r>
+                            <a:rPr lang="en-US" sz="2800" i="1">
+                              <a:solidFill>
+                                <a:srgbClr val="008000"/>
+                              </a:solidFill>
+                              <a:latin typeface="Cambria Math" panose="02040503050406030204" pitchFamily="18" charset="0"/>
+                            </a:rPr>
+                            <m:t>𝑢</m:t>
+                          </m:r>
+                        </m:e>
+                        <m:sup>
+                          <m:r>
+                            <a:rPr lang="en-US" sz="2800" i="1">
+                              <a:solidFill>
+                                <a:srgbClr val="008000"/>
+                              </a:solidFill>
+                              <a:latin typeface="Cambria Math" panose="02040503050406030204" pitchFamily="18" charset="0"/>
+                            </a:rPr>
+                            <m:t>2+</m:t>
+                          </m:r>
+                        </m:sup>
+                      </m:sSup>
+                      <m:d>
+                        <m:dPr>
+                          <m:ctrlPr>
+                            <a:rPr lang="en-US" sz="2800" i="1">
+                              <a:solidFill>
+                                <a:srgbClr val="008000"/>
+                              </a:solidFill>
+                              <a:latin typeface="Cambria Math" panose="02040503050406030204" pitchFamily="18" charset="0"/>
+                            </a:rPr>
+                          </m:ctrlPr>
+                        </m:dPr>
+                        <m:e>
+                          <m:r>
+                            <a:rPr lang="en-US" sz="2800" i="1">
+                              <a:solidFill>
+                                <a:srgbClr val="008000"/>
+                              </a:solidFill>
+                              <a:latin typeface="Cambria Math" panose="02040503050406030204" pitchFamily="18" charset="0"/>
+                            </a:rPr>
+                            <m:t>𝑎𝑞</m:t>
+                          </m:r>
+                        </m:e>
+                      </m:d>
+                      <m:r>
+                        <a:rPr lang="en-US" sz="2800" i="1">
+                          <a:solidFill>
+                            <a:srgbClr val="008000"/>
+                          </a:solidFill>
+                          <a:latin typeface="Cambria Math" panose="02040503050406030204" pitchFamily="18" charset="0"/>
+                        </a:rPr>
+                        <m:t>→</m:t>
+                      </m:r>
+                      <m:r>
+                        <a:rPr lang="en-US" sz="2800" i="1">
+                          <a:solidFill>
+                            <a:srgbClr val="008000"/>
+                          </a:solidFill>
+                          <a:latin typeface="Cambria Math" panose="02040503050406030204" pitchFamily="18" charset="0"/>
+                        </a:rPr>
+                        <m:t>𝑍</m:t>
+                      </m:r>
+                      <m:sSup>
+                        <m:sSupPr>
+                          <m:ctrlPr>
+                            <a:rPr lang="en-US" sz="2800" i="1">
+                              <a:solidFill>
+                                <a:srgbClr val="008000"/>
+                              </a:solidFill>
+                              <a:latin typeface="Cambria Math" panose="02040503050406030204" pitchFamily="18" charset="0"/>
+                            </a:rPr>
+                          </m:ctrlPr>
+                        </m:sSupPr>
+                        <m:e>
+                          <m:r>
+                            <a:rPr lang="en-US" sz="2800" i="1">
+                              <a:solidFill>
+                                <a:srgbClr val="008000"/>
+                              </a:solidFill>
+                              <a:latin typeface="Cambria Math" panose="02040503050406030204" pitchFamily="18" charset="0"/>
+                            </a:rPr>
+                            <m:t>𝑛</m:t>
+                          </m:r>
+                        </m:e>
+                        <m:sup>
+                          <m:r>
+                            <a:rPr lang="en-US" sz="2800" i="1">
+                              <a:solidFill>
+                                <a:srgbClr val="008000"/>
+                              </a:solidFill>
+                              <a:latin typeface="Cambria Math" panose="02040503050406030204" pitchFamily="18" charset="0"/>
+                            </a:rPr>
+                            <m:t>2+</m:t>
+                          </m:r>
+                        </m:sup>
+                      </m:sSup>
+                      <m:d>
+                        <m:dPr>
+                          <m:ctrlPr>
+                            <a:rPr lang="en-US" sz="2800" i="1">
+                              <a:solidFill>
+                                <a:srgbClr val="008000"/>
+                              </a:solidFill>
+                              <a:latin typeface="Cambria Math" panose="02040503050406030204" pitchFamily="18" charset="0"/>
+                            </a:rPr>
+                          </m:ctrlPr>
+                        </m:dPr>
+                        <m:e>
+                          <m:r>
+                            <a:rPr lang="en-US" sz="2800" i="1">
+                              <a:solidFill>
+                                <a:srgbClr val="008000"/>
+                              </a:solidFill>
+                              <a:latin typeface="Cambria Math" panose="02040503050406030204" pitchFamily="18" charset="0"/>
+                            </a:rPr>
+                            <m:t>𝑎𝑞</m:t>
+                          </m:r>
+                        </m:e>
+                      </m:d>
+                      <m:r>
+                        <a:rPr lang="en-US" sz="2800" i="1">
+                          <a:solidFill>
+                            <a:srgbClr val="008000"/>
+                          </a:solidFill>
+                          <a:latin typeface="Cambria Math" panose="02040503050406030204" pitchFamily="18" charset="0"/>
+                        </a:rPr>
+                        <m:t>+</m:t>
+                      </m:r>
+                      <m:r>
+                        <a:rPr lang="en-US" sz="2800" i="1">
+                          <a:solidFill>
+                            <a:srgbClr val="008000"/>
+                          </a:solidFill>
+                          <a:latin typeface="Cambria Math" panose="02040503050406030204" pitchFamily="18" charset="0"/>
+                        </a:rPr>
+                        <m:t>𝐶𝑢</m:t>
+                      </m:r>
+                      <m:r>
+                        <a:rPr lang="en-US" sz="2800" i="1">
+                          <a:solidFill>
+                            <a:srgbClr val="008000"/>
+                          </a:solidFill>
+                          <a:latin typeface="Cambria Math" panose="02040503050406030204" pitchFamily="18" charset="0"/>
+                        </a:rPr>
+                        <m:t>(</m:t>
+                      </m:r>
+                      <m:r>
+                        <a:rPr lang="en-US" sz="2800" i="1">
+                          <a:solidFill>
+                            <a:srgbClr val="008000"/>
+                          </a:solidFill>
+                          <a:latin typeface="Cambria Math" panose="02040503050406030204" pitchFamily="18" charset="0"/>
+                        </a:rPr>
+                        <m:t>𝑠</m:t>
+                      </m:r>
+                      <m:r>
+                        <a:rPr lang="en-US" sz="2800" i="1">
+                          <a:solidFill>
+                            <a:srgbClr val="008000"/>
+                          </a:solidFill>
+                          <a:latin typeface="Cambria Math" panose="02040503050406030204" pitchFamily="18" charset="0"/>
+                        </a:rPr>
+                        <m:t>)</m:t>
+                      </m:r>
+                    </m:oMath>
+                  </m:oMathPara>
+                </a14:m>
+                <a:endParaRPr lang="en-US" sz="2800" dirty="0">
+                  <a:solidFill>
+                    <a:srgbClr val="008000"/>
+                  </a:solidFill>
+                </a:endParaRPr>
+              </a:p>
+            </p:txBody>
+          </p:sp>
+        </mc:Choice>
+        <mc:Fallback>
+          <p:sp>
+            <p:nvSpPr>
+              <p:cNvPr id="15" name="TextBox 14">
+                <a:extLst>
+                  <a:ext uri="{FF2B5EF4-FFF2-40B4-BE49-F238E27FC236}">
+                    <a16:creationId xmlns:a16="http://schemas.microsoft.com/office/drawing/2014/main" id="{4D7A4307-35FE-DCE4-F6EF-739E6042F49E}"/>
+                  </a:ext>
+                </a:extLst>
+              </p:cNvPr>
+              <p:cNvSpPr txBox="1">
+                <a:spLocks noRot="1" noChangeAspect="1" noMove="1" noResize="1" noEditPoints="1" noAdjustHandles="1" noChangeArrowheads="1" noChangeShapeType="1" noTextEdit="1"/>
+              </p:cNvSpPr>
+              <p:nvPr/>
+            </p:nvSpPr>
+            <p:spPr>
+              <a:xfrm>
+                <a:off x="3429028" y="3125407"/>
+                <a:ext cx="6415538" cy="523220"/>
+              </a:xfrm>
+              <a:prstGeom prst="rect">
+                <a:avLst/>
+              </a:prstGeom>
+              <a:blipFill>
+                <a:blip r:embed="rId5"/>
+                <a:stretch>
+                  <a:fillRect/>
+                </a:stretch>
+              </a:blipFill>
+            </p:spPr>
+            <p:txBody>
+              <a:bodyPr/>
+              <a:lstStyle/>
+              <a:p>
+                <a:r>
+                  <a:rPr lang="en-US">
+                    <a:noFill/>
+                  </a:rPr>
+                  <a:t> </a:t>
+                </a:r>
+              </a:p>
+            </p:txBody>
+          </p:sp>
+        </mc:Fallback>
+      </mc:AlternateContent>
+      <p:sp>
+        <p:nvSpPr>
+          <p:cNvPr id="16" name="TextBox 15">
+            <a:extLst>
+              <a:ext uri="{FF2B5EF4-FFF2-40B4-BE49-F238E27FC236}">
+                <a16:creationId xmlns:a16="http://schemas.microsoft.com/office/drawing/2014/main" id="{25DDA36C-6F54-E649-1ED1-7E5060F1AB9F}"/>
+              </a:ext>
+            </a:extLst>
+          </p:cNvPr>
+          <p:cNvSpPr txBox="1"/>
+          <p:nvPr/>
+        </p:nvSpPr>
+        <p:spPr>
+          <a:xfrm>
+            <a:off x="5652025" y="3947160"/>
+            <a:ext cx="6415537" cy="954107"/>
+          </a:xfrm>
+          <a:prstGeom prst="rect">
+            <a:avLst/>
+          </a:prstGeom>
+          <a:noFill/>
+        </p:spPr>
+        <p:txBody>
+          <a:bodyPr wrap="square" rtlCol="0">
+            <a:spAutoFit/>
+          </a:bodyPr>
+          <a:lstStyle/>
+          <a:p>
+            <a:r>
+              <a:rPr lang="en-US" sz="2800" dirty="0"/>
+              <a:t>Difference of </a:t>
+            </a:r>
+            <a:r>
+              <a:rPr lang="en-US" sz="2800" b="1" dirty="0">
+                <a:solidFill>
+                  <a:srgbClr val="FF0000"/>
+                </a:solidFill>
+              </a:rPr>
+              <a:t>reduction</a:t>
+            </a:r>
+            <a:r>
+              <a:rPr lang="en-US" sz="2800" dirty="0"/>
+              <a:t> </a:t>
+            </a:r>
+            <a:r>
+              <a:rPr lang="en-US" sz="2800" b="1" dirty="0">
+                <a:solidFill>
+                  <a:srgbClr val="008000"/>
+                </a:solidFill>
+              </a:rPr>
+              <a:t>half-reactions</a:t>
+            </a:r>
+            <a:r>
+              <a:rPr lang="en-US" sz="2800" dirty="0"/>
+              <a:t>:  </a:t>
+            </a:r>
+          </a:p>
+          <a:p>
+            <a:r>
+              <a:rPr lang="en-US" sz="2800" b="1" dirty="0">
+                <a:solidFill>
+                  <a:srgbClr val="FF0000"/>
+                </a:solidFill>
+              </a:rPr>
+              <a:t>          Right (cathode) </a:t>
+            </a:r>
+            <a:r>
+              <a:rPr lang="en-US" sz="2800" dirty="0"/>
+              <a:t>– </a:t>
+            </a:r>
+            <a:r>
+              <a:rPr lang="en-US" sz="2800" b="1" dirty="0">
+                <a:solidFill>
+                  <a:srgbClr val="7030A0"/>
+                </a:solidFill>
+              </a:rPr>
+              <a:t>Left (anode)</a:t>
+            </a:r>
+          </a:p>
+        </p:txBody>
+      </p:sp>
+      <mc:AlternateContent xmlns:mc="http://schemas.openxmlformats.org/markup-compatibility/2006">
+        <mc:Choice xmlns:a14="http://schemas.microsoft.com/office/drawing/2010/main" Requires="a14">
+          <p:sp>
+            <p:nvSpPr>
+              <p:cNvPr id="17" name="TextBox 16">
+                <a:extLst>
+                  <a:ext uri="{FF2B5EF4-FFF2-40B4-BE49-F238E27FC236}">
+                    <a16:creationId xmlns:a16="http://schemas.microsoft.com/office/drawing/2014/main" id="{D4B9F7C9-B7CF-ADB1-2B8B-2AC72C3C4767}"/>
+                  </a:ext>
+                </a:extLst>
+              </p:cNvPr>
+              <p:cNvSpPr txBox="1"/>
+              <p:nvPr/>
+            </p:nvSpPr>
+            <p:spPr>
+              <a:xfrm>
+                <a:off x="6160346" y="5047690"/>
+                <a:ext cx="4275721" cy="523220"/>
+              </a:xfrm>
+              <a:prstGeom prst="rect">
+                <a:avLst/>
+              </a:prstGeom>
+              <a:noFill/>
+            </p:spPr>
+            <p:txBody>
+              <a:bodyPr wrap="none" rtlCol="0">
+                <a:spAutoFit/>
+              </a:bodyPr>
+              <a:lstStyle/>
+              <a:p>
+                <a:pPr/>
+                <a14:m>
+                  <m:oMathPara xmlns:m="http://schemas.openxmlformats.org/officeDocument/2006/math">
+                    <m:oMathParaPr>
+                      <m:jc m:val="centerGroup"/>
+                    </m:oMathParaPr>
+                    <m:oMath xmlns:m="http://schemas.openxmlformats.org/officeDocument/2006/math">
+                      <m:r>
+                        <a:rPr lang="en-US" sz="2800" i="1" smtClean="0">
+                          <a:solidFill>
+                            <a:srgbClr val="FF0000"/>
+                          </a:solidFill>
+                          <a:latin typeface="Cambria Math" panose="02040503050406030204" pitchFamily="18" charset="0"/>
+                        </a:rPr>
+                        <m:t>𝐶</m:t>
+                      </m:r>
+                      <m:sSup>
+                        <m:sSupPr>
+                          <m:ctrlPr>
+                            <a:rPr lang="en-US" sz="2800" i="1">
+                              <a:solidFill>
+                                <a:srgbClr val="FF0000"/>
+                              </a:solidFill>
+                              <a:latin typeface="Cambria Math" panose="02040503050406030204" pitchFamily="18" charset="0"/>
+                            </a:rPr>
+                          </m:ctrlPr>
+                        </m:sSupPr>
+                        <m:e>
+                          <m:r>
+                            <a:rPr lang="en-US" sz="2800" i="1">
+                              <a:solidFill>
+                                <a:srgbClr val="FF0000"/>
+                              </a:solidFill>
+                              <a:latin typeface="Cambria Math" panose="02040503050406030204" pitchFamily="18" charset="0"/>
+                            </a:rPr>
+                            <m:t>𝑢</m:t>
+                          </m:r>
+                        </m:e>
+                        <m:sup>
+                          <m:r>
+                            <a:rPr lang="en-US" sz="2800" i="1">
+                              <a:solidFill>
+                                <a:srgbClr val="FF0000"/>
+                              </a:solidFill>
+                              <a:latin typeface="Cambria Math" panose="02040503050406030204" pitchFamily="18" charset="0"/>
+                            </a:rPr>
+                            <m:t>2+</m:t>
+                          </m:r>
+                        </m:sup>
+                      </m:sSup>
+                      <m:d>
+                        <m:dPr>
+                          <m:ctrlPr>
+                            <a:rPr lang="en-US" sz="2800" i="1">
+                              <a:solidFill>
+                                <a:srgbClr val="FF0000"/>
+                              </a:solidFill>
+                              <a:latin typeface="Cambria Math" panose="02040503050406030204" pitchFamily="18" charset="0"/>
+                            </a:rPr>
+                          </m:ctrlPr>
+                        </m:dPr>
+                        <m:e>
+                          <m:r>
+                            <a:rPr lang="en-US" sz="2800" i="1">
+                              <a:solidFill>
+                                <a:srgbClr val="FF0000"/>
+                              </a:solidFill>
+                              <a:latin typeface="Cambria Math" panose="02040503050406030204" pitchFamily="18" charset="0"/>
+                            </a:rPr>
+                            <m:t>𝑎𝑞</m:t>
+                          </m:r>
+                        </m:e>
+                      </m:d>
+                      <m:r>
+                        <a:rPr lang="en-US" sz="2800" i="1">
+                          <a:solidFill>
+                            <a:srgbClr val="FF0000"/>
+                          </a:solidFill>
+                          <a:latin typeface="Cambria Math" panose="02040503050406030204" pitchFamily="18" charset="0"/>
+                        </a:rPr>
+                        <m:t>+2</m:t>
+                      </m:r>
+                      <m:sSup>
+                        <m:sSupPr>
+                          <m:ctrlPr>
+                            <a:rPr lang="en-US" sz="2800" i="1">
+                              <a:solidFill>
+                                <a:srgbClr val="FF0000"/>
+                              </a:solidFill>
+                              <a:latin typeface="Cambria Math" panose="02040503050406030204" pitchFamily="18" charset="0"/>
+                            </a:rPr>
+                          </m:ctrlPr>
+                        </m:sSupPr>
+                        <m:e>
+                          <m:r>
+                            <a:rPr lang="en-US" sz="2800" i="1">
+                              <a:solidFill>
+                                <a:srgbClr val="FF0000"/>
+                              </a:solidFill>
+                              <a:latin typeface="Cambria Math" panose="02040503050406030204" pitchFamily="18" charset="0"/>
+                            </a:rPr>
+                            <m:t>𝑒</m:t>
+                          </m:r>
+                        </m:e>
+                        <m:sup>
+                          <m:r>
+                            <a:rPr lang="en-US" sz="2800" i="1">
+                              <a:solidFill>
+                                <a:srgbClr val="FF0000"/>
+                              </a:solidFill>
+                              <a:latin typeface="Cambria Math" panose="02040503050406030204" pitchFamily="18" charset="0"/>
+                            </a:rPr>
+                            <m:t>−</m:t>
+                          </m:r>
+                        </m:sup>
+                      </m:sSup>
+                      <m:r>
+                        <a:rPr lang="en-US" sz="2800" i="1">
+                          <a:solidFill>
+                            <a:srgbClr val="FF0000"/>
+                          </a:solidFill>
+                          <a:latin typeface="Cambria Math" panose="02040503050406030204" pitchFamily="18" charset="0"/>
+                        </a:rPr>
+                        <m:t>→</m:t>
+                      </m:r>
+                      <m:r>
+                        <a:rPr lang="en-US" sz="2800" i="1">
+                          <a:solidFill>
+                            <a:srgbClr val="FF0000"/>
+                          </a:solidFill>
+                          <a:latin typeface="Cambria Math" panose="02040503050406030204" pitchFamily="18" charset="0"/>
+                        </a:rPr>
+                        <m:t>𝐶𝑢</m:t>
+                      </m:r>
+                      <m:r>
+                        <a:rPr lang="en-US" sz="2800" i="1">
+                          <a:solidFill>
+                            <a:srgbClr val="FF0000"/>
+                          </a:solidFill>
+                          <a:latin typeface="Cambria Math" panose="02040503050406030204" pitchFamily="18" charset="0"/>
+                        </a:rPr>
+                        <m:t> (</m:t>
+                      </m:r>
+                      <m:r>
+                        <a:rPr lang="en-US" sz="2800" i="1">
+                          <a:solidFill>
+                            <a:srgbClr val="FF0000"/>
+                          </a:solidFill>
+                          <a:latin typeface="Cambria Math" panose="02040503050406030204" pitchFamily="18" charset="0"/>
+                        </a:rPr>
+                        <m:t>𝑠</m:t>
+                      </m:r>
+                      <m:r>
+                        <a:rPr lang="en-US" sz="2800" i="1">
+                          <a:solidFill>
+                            <a:srgbClr val="FF0000"/>
+                          </a:solidFill>
+                          <a:latin typeface="Cambria Math" panose="02040503050406030204" pitchFamily="18" charset="0"/>
+                        </a:rPr>
+                        <m:t>)</m:t>
+                      </m:r>
+                    </m:oMath>
+                  </m:oMathPara>
+                </a14:m>
+                <a:endParaRPr lang="en-US" sz="2800" dirty="0">
+                  <a:solidFill>
+                    <a:srgbClr val="FF0000"/>
+                  </a:solidFill>
+                </a:endParaRPr>
+              </a:p>
+            </p:txBody>
+          </p:sp>
+        </mc:Choice>
+        <mc:Fallback>
+          <p:sp>
+            <p:nvSpPr>
+              <p:cNvPr id="17" name="TextBox 16">
+                <a:extLst>
+                  <a:ext uri="{FF2B5EF4-FFF2-40B4-BE49-F238E27FC236}">
+                    <a16:creationId xmlns:a16="http://schemas.microsoft.com/office/drawing/2014/main" id="{D4B9F7C9-B7CF-ADB1-2B8B-2AC72C3C4767}"/>
+                  </a:ext>
+                </a:extLst>
+              </p:cNvPr>
+              <p:cNvSpPr txBox="1">
+                <a:spLocks noRot="1" noChangeAspect="1" noMove="1" noResize="1" noEditPoints="1" noAdjustHandles="1" noChangeArrowheads="1" noChangeShapeType="1" noTextEdit="1"/>
+              </p:cNvSpPr>
+              <p:nvPr/>
+            </p:nvSpPr>
+            <p:spPr>
+              <a:xfrm>
+                <a:off x="6160346" y="5047690"/>
+                <a:ext cx="4275721" cy="523220"/>
+              </a:xfrm>
+              <a:prstGeom prst="rect">
+                <a:avLst/>
+              </a:prstGeom>
+              <a:blipFill>
+                <a:blip r:embed="rId6"/>
+                <a:stretch>
+                  <a:fillRect/>
+                </a:stretch>
+              </a:blipFill>
+            </p:spPr>
+            <p:txBody>
+              <a:bodyPr/>
+              <a:lstStyle/>
+              <a:p>
+                <a:r>
+                  <a:rPr lang="en-US">
+                    <a:noFill/>
+                  </a:rPr>
+                  <a:t> </a:t>
+                </a:r>
+              </a:p>
+            </p:txBody>
+          </p:sp>
+        </mc:Fallback>
+      </mc:AlternateContent>
+      <mc:AlternateContent xmlns:mc="http://schemas.openxmlformats.org/markup-compatibility/2006">
+        <mc:Choice xmlns:a14="http://schemas.microsoft.com/office/drawing/2010/main" Requires="a14">
+          <p:sp>
+            <p:nvSpPr>
+              <p:cNvPr id="18" name="TextBox 17">
+                <a:extLst>
+                  <a:ext uri="{FF2B5EF4-FFF2-40B4-BE49-F238E27FC236}">
+                    <a16:creationId xmlns:a16="http://schemas.microsoft.com/office/drawing/2014/main" id="{3C89D1F8-FFAF-22C0-D837-74A3AA07DFE8}"/>
+                  </a:ext>
+                </a:extLst>
+              </p:cNvPr>
+              <p:cNvSpPr txBox="1"/>
+              <p:nvPr/>
+            </p:nvSpPr>
+            <p:spPr>
+              <a:xfrm>
+                <a:off x="6207729" y="5608999"/>
+                <a:ext cx="4180953" cy="523220"/>
+              </a:xfrm>
+              <a:prstGeom prst="rect">
+                <a:avLst/>
+              </a:prstGeom>
+              <a:noFill/>
+            </p:spPr>
+            <p:txBody>
+              <a:bodyPr wrap="none" rtlCol="0">
+                <a:spAutoFit/>
+              </a:bodyPr>
+              <a:lstStyle/>
+              <a:p>
+                <a:pPr/>
+                <a14:m>
+                  <m:oMathPara xmlns:m="http://schemas.openxmlformats.org/officeDocument/2006/math">
+                    <m:oMathParaPr>
+                      <m:jc m:val="centerGroup"/>
+                    </m:oMathParaPr>
+                    <m:oMath xmlns:m="http://schemas.openxmlformats.org/officeDocument/2006/math">
+                      <m:r>
+                        <a:rPr lang="en-US" sz="2800" i="1" smtClean="0">
+                          <a:solidFill>
+                            <a:srgbClr val="7030A0"/>
+                          </a:solidFill>
+                          <a:latin typeface="Cambria Math" panose="02040503050406030204" pitchFamily="18" charset="0"/>
+                        </a:rPr>
+                        <m:t>𝑍</m:t>
+                      </m:r>
+                      <m:sSup>
+                        <m:sSupPr>
+                          <m:ctrlPr>
+                            <a:rPr lang="en-US" sz="2800" i="1">
+                              <a:solidFill>
+                                <a:srgbClr val="7030A0"/>
+                              </a:solidFill>
+                              <a:latin typeface="Cambria Math" panose="02040503050406030204" pitchFamily="18" charset="0"/>
+                            </a:rPr>
+                          </m:ctrlPr>
+                        </m:sSupPr>
+                        <m:e>
+                          <m:r>
+                            <a:rPr lang="en-US" sz="2800" i="1">
+                              <a:solidFill>
+                                <a:srgbClr val="7030A0"/>
+                              </a:solidFill>
+                              <a:latin typeface="Cambria Math" panose="02040503050406030204" pitchFamily="18" charset="0"/>
+                            </a:rPr>
+                            <m:t>𝑛</m:t>
+                          </m:r>
+                        </m:e>
+                        <m:sup>
+                          <m:r>
+                            <a:rPr lang="en-US" sz="2800" i="1">
+                              <a:solidFill>
+                                <a:srgbClr val="7030A0"/>
+                              </a:solidFill>
+                              <a:latin typeface="Cambria Math" panose="02040503050406030204" pitchFamily="18" charset="0"/>
+                            </a:rPr>
+                            <m:t>2+</m:t>
+                          </m:r>
+                        </m:sup>
+                      </m:sSup>
+                      <m:d>
+                        <m:dPr>
+                          <m:ctrlPr>
+                            <a:rPr lang="en-US" sz="2800" i="1">
+                              <a:solidFill>
+                                <a:srgbClr val="7030A0"/>
+                              </a:solidFill>
+                              <a:latin typeface="Cambria Math" panose="02040503050406030204" pitchFamily="18" charset="0"/>
+                            </a:rPr>
+                          </m:ctrlPr>
+                        </m:dPr>
+                        <m:e>
+                          <m:r>
+                            <a:rPr lang="en-US" sz="2800" i="1">
+                              <a:solidFill>
+                                <a:srgbClr val="7030A0"/>
+                              </a:solidFill>
+                              <a:latin typeface="Cambria Math" panose="02040503050406030204" pitchFamily="18" charset="0"/>
+                            </a:rPr>
+                            <m:t>𝑎𝑞</m:t>
+                          </m:r>
+                        </m:e>
+                      </m:d>
+                      <m:r>
+                        <a:rPr lang="en-US" sz="2800" i="1">
+                          <a:solidFill>
+                            <a:srgbClr val="7030A0"/>
+                          </a:solidFill>
+                          <a:latin typeface="Cambria Math" panose="02040503050406030204" pitchFamily="18" charset="0"/>
+                        </a:rPr>
+                        <m:t>+2</m:t>
+                      </m:r>
+                      <m:sSup>
+                        <m:sSupPr>
+                          <m:ctrlPr>
+                            <a:rPr lang="en-US" sz="2800" i="1">
+                              <a:solidFill>
+                                <a:srgbClr val="7030A0"/>
+                              </a:solidFill>
+                              <a:latin typeface="Cambria Math" panose="02040503050406030204" pitchFamily="18" charset="0"/>
+                            </a:rPr>
+                          </m:ctrlPr>
+                        </m:sSupPr>
+                        <m:e>
+                          <m:r>
+                            <a:rPr lang="en-US" sz="2800" i="1">
+                              <a:solidFill>
+                                <a:srgbClr val="7030A0"/>
+                              </a:solidFill>
+                              <a:latin typeface="Cambria Math" panose="02040503050406030204" pitchFamily="18" charset="0"/>
+                            </a:rPr>
+                            <m:t>𝑒</m:t>
+                          </m:r>
+                        </m:e>
+                        <m:sup>
+                          <m:r>
+                            <a:rPr lang="en-US" sz="2800" i="1">
+                              <a:solidFill>
+                                <a:srgbClr val="7030A0"/>
+                              </a:solidFill>
+                              <a:latin typeface="Cambria Math" panose="02040503050406030204" pitchFamily="18" charset="0"/>
+                            </a:rPr>
+                            <m:t>−</m:t>
+                          </m:r>
+                        </m:sup>
+                      </m:sSup>
+                      <m:r>
+                        <a:rPr lang="en-US" sz="2800" i="1">
+                          <a:solidFill>
+                            <a:srgbClr val="7030A0"/>
+                          </a:solidFill>
+                          <a:latin typeface="Cambria Math" panose="02040503050406030204" pitchFamily="18" charset="0"/>
+                        </a:rPr>
+                        <m:t>→</m:t>
+                      </m:r>
+                      <m:r>
+                        <a:rPr lang="en-US" sz="2800" i="1">
+                          <a:solidFill>
+                            <a:srgbClr val="7030A0"/>
+                          </a:solidFill>
+                          <a:latin typeface="Cambria Math" panose="02040503050406030204" pitchFamily="18" charset="0"/>
+                        </a:rPr>
+                        <m:t>𝑍𝑛</m:t>
+                      </m:r>
+                      <m:d>
+                        <m:dPr>
+                          <m:ctrlPr>
+                            <a:rPr lang="en-US" sz="2800" i="1">
+                              <a:solidFill>
+                                <a:srgbClr val="7030A0"/>
+                              </a:solidFill>
+                              <a:latin typeface="Cambria Math" panose="02040503050406030204" pitchFamily="18" charset="0"/>
+                            </a:rPr>
+                          </m:ctrlPr>
+                        </m:dPr>
+                        <m:e>
+                          <m:r>
+                            <a:rPr lang="en-US" sz="2800" i="1">
+                              <a:solidFill>
+                                <a:srgbClr val="7030A0"/>
+                              </a:solidFill>
+                              <a:latin typeface="Cambria Math" panose="02040503050406030204" pitchFamily="18" charset="0"/>
+                            </a:rPr>
+                            <m:t>𝑠</m:t>
+                          </m:r>
+                        </m:e>
+                      </m:d>
+                    </m:oMath>
+                  </m:oMathPara>
+                </a14:m>
+                <a:endParaRPr lang="en-US" sz="2800" dirty="0">
+                  <a:solidFill>
+                    <a:srgbClr val="7030A0"/>
+                  </a:solidFill>
+                </a:endParaRPr>
+              </a:p>
+            </p:txBody>
+          </p:sp>
+        </mc:Choice>
+        <mc:Fallback>
+          <p:sp>
+            <p:nvSpPr>
+              <p:cNvPr id="18" name="TextBox 17">
+                <a:extLst>
+                  <a:ext uri="{FF2B5EF4-FFF2-40B4-BE49-F238E27FC236}">
+                    <a16:creationId xmlns:a16="http://schemas.microsoft.com/office/drawing/2014/main" id="{3C89D1F8-FFAF-22C0-D837-74A3AA07DFE8}"/>
+                  </a:ext>
+                </a:extLst>
+              </p:cNvPr>
+              <p:cNvSpPr txBox="1">
+                <a:spLocks noRot="1" noChangeAspect="1" noMove="1" noResize="1" noEditPoints="1" noAdjustHandles="1" noChangeArrowheads="1" noChangeShapeType="1" noTextEdit="1"/>
+              </p:cNvSpPr>
+              <p:nvPr/>
+            </p:nvSpPr>
+            <p:spPr>
+              <a:xfrm>
+                <a:off x="6207729" y="5608999"/>
+                <a:ext cx="4180953" cy="523220"/>
+              </a:xfrm>
+              <a:prstGeom prst="rect">
+                <a:avLst/>
+              </a:prstGeom>
+              <a:blipFill>
+                <a:blip r:embed="rId7"/>
+                <a:stretch>
+                  <a:fillRect/>
+                </a:stretch>
+              </a:blipFill>
+            </p:spPr>
+            <p:txBody>
+              <a:bodyPr/>
+              <a:lstStyle/>
+              <a:p>
+                <a:r>
+                  <a:rPr lang="en-US">
+                    <a:noFill/>
+                  </a:rPr>
+                  <a:t> </a:t>
+                </a:r>
+              </a:p>
+            </p:txBody>
+          </p:sp>
+        </mc:Fallback>
+      </mc:AlternateContent>
+      <p:sp>
+        <p:nvSpPr>
+          <p:cNvPr id="19" name="TextBox 18">
+            <a:extLst>
+              <a:ext uri="{FF2B5EF4-FFF2-40B4-BE49-F238E27FC236}">
+                <a16:creationId xmlns:a16="http://schemas.microsoft.com/office/drawing/2014/main" id="{1DA867E9-9E64-52C6-1EBD-F1AFCD92EF3B}"/>
+              </a:ext>
+            </a:extLst>
+          </p:cNvPr>
+          <p:cNvSpPr txBox="1"/>
+          <p:nvPr/>
+        </p:nvSpPr>
+        <p:spPr>
+          <a:xfrm>
+            <a:off x="10527470" y="5021691"/>
+            <a:ext cx="1186543" cy="523220"/>
+          </a:xfrm>
+          <a:prstGeom prst="rect">
+            <a:avLst/>
+          </a:prstGeom>
+          <a:noFill/>
+        </p:spPr>
+        <p:txBody>
+          <a:bodyPr wrap="none" rtlCol="0">
+            <a:spAutoFit/>
+          </a:bodyPr>
+          <a:lstStyle/>
+          <a:p>
+            <a:r>
+              <a:rPr lang="en-US" sz="2800" dirty="0"/>
+              <a:t>(Right)</a:t>
+            </a:r>
+          </a:p>
+        </p:txBody>
+      </p:sp>
+      <p:sp>
+        <p:nvSpPr>
+          <p:cNvPr id="20" name="TextBox 19">
+            <a:extLst>
+              <a:ext uri="{FF2B5EF4-FFF2-40B4-BE49-F238E27FC236}">
+                <a16:creationId xmlns:a16="http://schemas.microsoft.com/office/drawing/2014/main" id="{71BD2222-8D11-ED1B-B608-CDA2D311CBD1}"/>
+              </a:ext>
+            </a:extLst>
+          </p:cNvPr>
+          <p:cNvSpPr txBox="1"/>
+          <p:nvPr/>
+        </p:nvSpPr>
+        <p:spPr>
+          <a:xfrm>
+            <a:off x="10527470" y="5608999"/>
+            <a:ext cx="990784" cy="523220"/>
+          </a:xfrm>
+          <a:prstGeom prst="rect">
+            <a:avLst/>
+          </a:prstGeom>
+          <a:noFill/>
+        </p:spPr>
+        <p:txBody>
+          <a:bodyPr wrap="none" rtlCol="0">
+            <a:spAutoFit/>
+          </a:bodyPr>
+          <a:lstStyle/>
+          <a:p>
+            <a:r>
+              <a:rPr lang="en-US" sz="2800" dirty="0"/>
+              <a:t>(Left)</a:t>
+            </a:r>
+          </a:p>
+        </p:txBody>
+      </p:sp>
+      <mc:AlternateContent xmlns:mc="http://schemas.openxmlformats.org/markup-compatibility/2006">
+        <mc:Choice xmlns:a14="http://schemas.microsoft.com/office/drawing/2010/main" Requires="a14">
+          <p:sp>
+            <p:nvSpPr>
+              <p:cNvPr id="21" name="TextBox 20">
+                <a:extLst>
+                  <a:ext uri="{FF2B5EF4-FFF2-40B4-BE49-F238E27FC236}">
+                    <a16:creationId xmlns:a16="http://schemas.microsoft.com/office/drawing/2014/main" id="{58DEF6F5-C409-A073-4082-9C2DBFF43373}"/>
+                  </a:ext>
+                </a:extLst>
+              </p:cNvPr>
+              <p:cNvSpPr txBox="1"/>
+              <p:nvPr/>
+            </p:nvSpPr>
+            <p:spPr>
+              <a:xfrm>
+                <a:off x="255524" y="3948432"/>
+                <a:ext cx="5686269" cy="2246769"/>
+              </a:xfrm>
+              <a:prstGeom prst="rect">
+                <a:avLst/>
+              </a:prstGeom>
+              <a:noFill/>
+            </p:spPr>
+            <p:txBody>
+              <a:bodyPr wrap="square">
+                <a:spAutoFit/>
+              </a:bodyPr>
+              <a:lstStyle/>
+              <a:p>
+                <a:r>
+                  <a:rPr lang="en-US" sz="2800" dirty="0"/>
+                  <a:t>Sum of </a:t>
+                </a:r>
+                <a:r>
+                  <a:rPr lang="en-US" sz="2800" b="1" dirty="0">
+                    <a:solidFill>
+                      <a:srgbClr val="0000FF"/>
+                    </a:solidFill>
+                  </a:rPr>
+                  <a:t>oxidation</a:t>
+                </a:r>
+                <a:r>
+                  <a:rPr lang="en-US" sz="2800" dirty="0">
+                    <a:solidFill>
+                      <a:srgbClr val="FF0000"/>
+                    </a:solidFill>
+                  </a:rPr>
+                  <a:t> and </a:t>
+                </a:r>
+                <a:r>
+                  <a:rPr lang="en-US" sz="2800" b="1" dirty="0">
+                    <a:solidFill>
+                      <a:srgbClr val="FF0000"/>
+                    </a:solidFill>
+                  </a:rPr>
+                  <a:t>reduction</a:t>
+                </a:r>
+                <a:endParaRPr lang="en-US" sz="2800" b="1" dirty="0"/>
+              </a:p>
+              <a:p>
+                <a:pPr/>
+                <a:endParaRPr lang="en-US" sz="2800" i="1" dirty="0">
+                  <a:solidFill>
+                    <a:srgbClr val="0000FF"/>
+                  </a:solidFill>
+                  <a:latin typeface="Cambria Math" panose="02040503050406030204" pitchFamily="18" charset="0"/>
+                </a:endParaRPr>
+              </a:p>
+              <a:p>
+                <a:pPr/>
+                <a:endParaRPr lang="en-US" sz="2800" i="1" dirty="0">
+                  <a:solidFill>
+                    <a:srgbClr val="0000FF"/>
+                  </a:solidFill>
+                  <a:latin typeface="Cambria Math" panose="02040503050406030204" pitchFamily="18" charset="0"/>
+                </a:endParaRPr>
+              </a:p>
+              <a:p>
+                <a:pPr/>
+                <a14:m>
+                  <m:oMathPara xmlns:m="http://schemas.openxmlformats.org/officeDocument/2006/math">
+                    <m:oMathParaPr>
+                      <m:jc m:val="centerGroup"/>
+                    </m:oMathParaPr>
+                    <m:oMath xmlns:m="http://schemas.openxmlformats.org/officeDocument/2006/math">
+                      <m:r>
+                        <a:rPr lang="en-US" sz="2800" i="1" smtClean="0">
+                          <a:solidFill>
+                            <a:srgbClr val="0000FF"/>
+                          </a:solidFill>
+                          <a:latin typeface="Cambria Math" panose="02040503050406030204" pitchFamily="18" charset="0"/>
+                        </a:rPr>
+                        <m:t>𝑍𝑛</m:t>
+                      </m:r>
+                      <m:d>
+                        <m:dPr>
+                          <m:ctrlPr>
+                            <a:rPr lang="en-US" sz="2800" i="1">
+                              <a:solidFill>
+                                <a:srgbClr val="0000FF"/>
+                              </a:solidFill>
+                              <a:latin typeface="Cambria Math" panose="02040503050406030204" pitchFamily="18" charset="0"/>
+                            </a:rPr>
+                          </m:ctrlPr>
+                        </m:dPr>
+                        <m:e>
+                          <m:r>
+                            <a:rPr lang="en-US" sz="2800" i="1">
+                              <a:solidFill>
+                                <a:srgbClr val="0000FF"/>
+                              </a:solidFill>
+                              <a:latin typeface="Cambria Math" panose="02040503050406030204" pitchFamily="18" charset="0"/>
+                            </a:rPr>
+                            <m:t>𝑠</m:t>
+                          </m:r>
+                        </m:e>
+                      </m:d>
+                      <m:r>
+                        <a:rPr lang="en-US" sz="2800" i="1">
+                          <a:solidFill>
+                            <a:srgbClr val="0000FF"/>
+                          </a:solidFill>
+                          <a:latin typeface="Cambria Math" panose="02040503050406030204" pitchFamily="18" charset="0"/>
+                        </a:rPr>
+                        <m:t>−2</m:t>
+                      </m:r>
+                      <m:sSup>
+                        <m:sSupPr>
+                          <m:ctrlPr>
+                            <a:rPr lang="en-US" sz="2800" i="1">
+                              <a:solidFill>
+                                <a:srgbClr val="0000FF"/>
+                              </a:solidFill>
+                              <a:latin typeface="Cambria Math" panose="02040503050406030204" pitchFamily="18" charset="0"/>
+                            </a:rPr>
+                          </m:ctrlPr>
+                        </m:sSupPr>
+                        <m:e>
+                          <m:r>
+                            <a:rPr lang="en-US" sz="2800" i="1">
+                              <a:solidFill>
+                                <a:srgbClr val="0000FF"/>
+                              </a:solidFill>
+                              <a:latin typeface="Cambria Math" panose="02040503050406030204" pitchFamily="18" charset="0"/>
+                            </a:rPr>
+                            <m:t>𝑒</m:t>
+                          </m:r>
+                        </m:e>
+                        <m:sup>
+                          <m:r>
+                            <a:rPr lang="en-US" sz="2800" i="1">
+                              <a:solidFill>
+                                <a:srgbClr val="0000FF"/>
+                              </a:solidFill>
+                              <a:latin typeface="Cambria Math" panose="02040503050406030204" pitchFamily="18" charset="0"/>
+                            </a:rPr>
+                            <m:t>−</m:t>
+                          </m:r>
+                        </m:sup>
+                      </m:sSup>
+                      <m:r>
+                        <a:rPr lang="en-US" sz="2800" i="1">
+                          <a:solidFill>
+                            <a:srgbClr val="0000FF"/>
+                          </a:solidFill>
+                          <a:latin typeface="Cambria Math" panose="02040503050406030204" pitchFamily="18" charset="0"/>
+                        </a:rPr>
+                        <m:t>→</m:t>
+                      </m:r>
+                      <m:r>
+                        <a:rPr lang="en-US" sz="2800" i="1">
+                          <a:solidFill>
+                            <a:srgbClr val="0000FF"/>
+                          </a:solidFill>
+                          <a:latin typeface="Cambria Math" panose="02040503050406030204" pitchFamily="18" charset="0"/>
+                        </a:rPr>
+                        <m:t>𝑍</m:t>
+                      </m:r>
+                      <m:sSup>
+                        <m:sSupPr>
+                          <m:ctrlPr>
+                            <a:rPr lang="en-US" sz="2800" i="1">
+                              <a:solidFill>
+                                <a:srgbClr val="0000FF"/>
+                              </a:solidFill>
+                              <a:latin typeface="Cambria Math" panose="02040503050406030204" pitchFamily="18" charset="0"/>
+                            </a:rPr>
+                          </m:ctrlPr>
+                        </m:sSupPr>
+                        <m:e>
+                          <m:r>
+                            <a:rPr lang="en-US" sz="2800" i="1">
+                              <a:solidFill>
+                                <a:srgbClr val="0000FF"/>
+                              </a:solidFill>
+                              <a:latin typeface="Cambria Math" panose="02040503050406030204" pitchFamily="18" charset="0"/>
+                            </a:rPr>
+                            <m:t>𝑛</m:t>
+                          </m:r>
+                        </m:e>
+                        <m:sup>
+                          <m:r>
+                            <a:rPr lang="en-US" sz="2800" i="1">
+                              <a:solidFill>
+                                <a:srgbClr val="0000FF"/>
+                              </a:solidFill>
+                              <a:latin typeface="Cambria Math" panose="02040503050406030204" pitchFamily="18" charset="0"/>
+                            </a:rPr>
+                            <m:t>2+</m:t>
+                          </m:r>
+                        </m:sup>
+                      </m:sSup>
+                      <m:r>
+                        <a:rPr lang="en-US" sz="2800" i="1">
+                          <a:solidFill>
+                            <a:srgbClr val="0000FF"/>
+                          </a:solidFill>
+                          <a:latin typeface="Cambria Math" panose="02040503050406030204" pitchFamily="18" charset="0"/>
+                        </a:rPr>
+                        <m:t>(</m:t>
+                      </m:r>
+                      <m:r>
+                        <a:rPr lang="en-US" sz="2800" i="1">
+                          <a:solidFill>
+                            <a:srgbClr val="0000FF"/>
+                          </a:solidFill>
+                          <a:latin typeface="Cambria Math" panose="02040503050406030204" pitchFamily="18" charset="0"/>
+                        </a:rPr>
+                        <m:t>𝑎𝑞</m:t>
+                      </m:r>
+                      <m:r>
+                        <a:rPr lang="en-US" sz="2800" i="1">
+                          <a:solidFill>
+                            <a:srgbClr val="0000FF"/>
+                          </a:solidFill>
+                          <a:latin typeface="Cambria Math" panose="02040503050406030204" pitchFamily="18" charset="0"/>
+                        </a:rPr>
+                        <m:t>)</m:t>
+                      </m:r>
+                    </m:oMath>
+                  </m:oMathPara>
+                </a14:m>
+                <a:endParaRPr lang="en-US" sz="2800" dirty="0">
+                  <a:solidFill>
+                    <a:srgbClr val="0000FF"/>
+                  </a:solidFill>
+                </a:endParaRPr>
+              </a:p>
+              <a:p>
+                <a:pPr/>
+                <a14:m>
+                  <m:oMathPara xmlns:m="http://schemas.openxmlformats.org/officeDocument/2006/math">
+                    <m:oMathParaPr>
+                      <m:jc m:val="centerGroup"/>
+                    </m:oMathParaPr>
+                    <m:oMath xmlns:m="http://schemas.openxmlformats.org/officeDocument/2006/math">
+                      <m:r>
+                        <a:rPr lang="en-US" sz="2800" i="1" smtClean="0">
+                          <a:solidFill>
+                            <a:srgbClr val="FF0000"/>
+                          </a:solidFill>
+                          <a:latin typeface="Cambria Math" panose="02040503050406030204" pitchFamily="18" charset="0"/>
+                        </a:rPr>
+                        <m:t>𝐶</m:t>
+                      </m:r>
+                      <m:sSup>
+                        <m:sSupPr>
+                          <m:ctrlPr>
+                            <a:rPr lang="en-US" sz="2800" i="1">
+                              <a:solidFill>
+                                <a:srgbClr val="FF0000"/>
+                              </a:solidFill>
+                              <a:latin typeface="Cambria Math" panose="02040503050406030204" pitchFamily="18" charset="0"/>
+                            </a:rPr>
+                          </m:ctrlPr>
+                        </m:sSupPr>
+                        <m:e>
+                          <m:r>
+                            <a:rPr lang="en-US" sz="2800" i="1">
+                              <a:solidFill>
+                                <a:srgbClr val="FF0000"/>
+                              </a:solidFill>
+                              <a:latin typeface="Cambria Math" panose="02040503050406030204" pitchFamily="18" charset="0"/>
+                            </a:rPr>
+                            <m:t>𝑢</m:t>
+                          </m:r>
+                        </m:e>
+                        <m:sup>
+                          <m:r>
+                            <a:rPr lang="en-US" sz="2800" i="1">
+                              <a:solidFill>
+                                <a:srgbClr val="FF0000"/>
+                              </a:solidFill>
+                              <a:latin typeface="Cambria Math" panose="02040503050406030204" pitchFamily="18" charset="0"/>
+                            </a:rPr>
+                            <m:t>2+</m:t>
+                          </m:r>
+                        </m:sup>
+                      </m:sSup>
+                      <m:d>
+                        <m:dPr>
+                          <m:ctrlPr>
+                            <a:rPr lang="en-US" sz="2800" i="1">
+                              <a:solidFill>
+                                <a:srgbClr val="FF0000"/>
+                              </a:solidFill>
+                              <a:latin typeface="Cambria Math" panose="02040503050406030204" pitchFamily="18" charset="0"/>
+                            </a:rPr>
+                          </m:ctrlPr>
+                        </m:dPr>
+                        <m:e>
+                          <m:r>
+                            <a:rPr lang="en-US" sz="2800" i="1">
+                              <a:solidFill>
+                                <a:srgbClr val="FF0000"/>
+                              </a:solidFill>
+                              <a:latin typeface="Cambria Math" panose="02040503050406030204" pitchFamily="18" charset="0"/>
+                            </a:rPr>
+                            <m:t>𝑎𝑞</m:t>
+                          </m:r>
+                        </m:e>
+                      </m:d>
+                      <m:r>
+                        <a:rPr lang="en-US" sz="2800" i="1">
+                          <a:solidFill>
+                            <a:srgbClr val="FF0000"/>
+                          </a:solidFill>
+                          <a:latin typeface="Cambria Math" panose="02040503050406030204" pitchFamily="18" charset="0"/>
+                        </a:rPr>
+                        <m:t>+2</m:t>
+                      </m:r>
+                      <m:sSup>
+                        <m:sSupPr>
+                          <m:ctrlPr>
+                            <a:rPr lang="en-US" sz="2800" i="1">
+                              <a:solidFill>
+                                <a:srgbClr val="FF0000"/>
+                              </a:solidFill>
+                              <a:latin typeface="Cambria Math" panose="02040503050406030204" pitchFamily="18" charset="0"/>
+                            </a:rPr>
+                          </m:ctrlPr>
+                        </m:sSupPr>
+                        <m:e>
+                          <m:r>
+                            <a:rPr lang="en-US" sz="2800" i="1">
+                              <a:solidFill>
+                                <a:srgbClr val="FF0000"/>
+                              </a:solidFill>
+                              <a:latin typeface="Cambria Math" panose="02040503050406030204" pitchFamily="18" charset="0"/>
+                            </a:rPr>
+                            <m:t>𝑒</m:t>
+                          </m:r>
+                        </m:e>
+                        <m:sup>
+                          <m:r>
+                            <a:rPr lang="en-US" sz="2800" i="1">
+                              <a:solidFill>
+                                <a:srgbClr val="FF0000"/>
+                              </a:solidFill>
+                              <a:latin typeface="Cambria Math" panose="02040503050406030204" pitchFamily="18" charset="0"/>
+                            </a:rPr>
+                            <m:t>−</m:t>
+                          </m:r>
+                        </m:sup>
+                      </m:sSup>
+                      <m:r>
+                        <a:rPr lang="en-US" sz="2800" i="1">
+                          <a:solidFill>
+                            <a:srgbClr val="FF0000"/>
+                          </a:solidFill>
+                          <a:latin typeface="Cambria Math" panose="02040503050406030204" pitchFamily="18" charset="0"/>
+                        </a:rPr>
+                        <m:t>→</m:t>
+                      </m:r>
+                      <m:r>
+                        <a:rPr lang="en-US" sz="2800" i="1">
+                          <a:solidFill>
+                            <a:srgbClr val="FF0000"/>
+                          </a:solidFill>
+                          <a:latin typeface="Cambria Math" panose="02040503050406030204" pitchFamily="18" charset="0"/>
+                        </a:rPr>
+                        <m:t>𝐶𝑢</m:t>
+                      </m:r>
+                      <m:r>
+                        <a:rPr lang="en-US" sz="2800" i="1">
+                          <a:solidFill>
+                            <a:srgbClr val="FF0000"/>
+                          </a:solidFill>
+                          <a:latin typeface="Cambria Math" panose="02040503050406030204" pitchFamily="18" charset="0"/>
+                        </a:rPr>
+                        <m:t> (</m:t>
+                      </m:r>
+                      <m:r>
+                        <a:rPr lang="en-US" sz="2800" i="1">
+                          <a:solidFill>
+                            <a:srgbClr val="FF0000"/>
+                          </a:solidFill>
+                          <a:latin typeface="Cambria Math" panose="02040503050406030204" pitchFamily="18" charset="0"/>
+                        </a:rPr>
+                        <m:t>𝑠</m:t>
+                      </m:r>
+                      <m:r>
+                        <a:rPr lang="en-US" sz="2800" i="1">
+                          <a:solidFill>
+                            <a:srgbClr val="FF0000"/>
+                          </a:solidFill>
+                          <a:latin typeface="Cambria Math" panose="02040503050406030204" pitchFamily="18" charset="0"/>
+                        </a:rPr>
+                        <m:t>)</m:t>
+                      </m:r>
+                    </m:oMath>
+                  </m:oMathPara>
+                </a14:m>
+                <a:endParaRPr lang="en-US" sz="2800" dirty="0">
+                  <a:solidFill>
+                    <a:srgbClr val="FF0000"/>
+                  </a:solidFill>
+                </a:endParaRPr>
+              </a:p>
+            </p:txBody>
+          </p:sp>
+        </mc:Choice>
+        <mc:Fallback>
+          <p:sp>
+            <p:nvSpPr>
+              <p:cNvPr id="21" name="TextBox 20">
+                <a:extLst>
+                  <a:ext uri="{FF2B5EF4-FFF2-40B4-BE49-F238E27FC236}">
+                    <a16:creationId xmlns:a16="http://schemas.microsoft.com/office/drawing/2014/main" id="{58DEF6F5-C409-A073-4082-9C2DBFF43373}"/>
+                  </a:ext>
+                </a:extLst>
+              </p:cNvPr>
+              <p:cNvSpPr txBox="1">
+                <a:spLocks noRot="1" noChangeAspect="1" noMove="1" noResize="1" noEditPoints="1" noAdjustHandles="1" noChangeArrowheads="1" noChangeShapeType="1" noTextEdit="1"/>
+              </p:cNvSpPr>
+              <p:nvPr/>
+            </p:nvSpPr>
+            <p:spPr>
+              <a:xfrm>
+                <a:off x="255524" y="3948432"/>
+                <a:ext cx="5686269" cy="2246769"/>
+              </a:xfrm>
+              <a:prstGeom prst="rect">
+                <a:avLst/>
+              </a:prstGeom>
+              <a:blipFill>
+                <a:blip r:embed="rId8"/>
+                <a:stretch>
+                  <a:fillRect l="-2251" t="-2989"/>
+                </a:stretch>
+              </a:blipFill>
+            </p:spPr>
+            <p:txBody>
+              <a:bodyPr/>
+              <a:lstStyle/>
+              <a:p>
+                <a:r>
+                  <a:rPr lang="en-US">
+                    <a:noFill/>
+                  </a:rPr>
+                  <a:t> </a:t>
+                </a:r>
+              </a:p>
+            </p:txBody>
+          </p:sp>
+        </mc:Fallback>
+      </mc:AlternateContent>
+      <p:sp>
+        <p:nvSpPr>
+          <p:cNvPr id="25" name="TextBox 24">
+            <a:extLst>
+              <a:ext uri="{FF2B5EF4-FFF2-40B4-BE49-F238E27FC236}">
+                <a16:creationId xmlns:a16="http://schemas.microsoft.com/office/drawing/2014/main" id="{B81A76D4-027B-4D6E-C652-37BF854836F6}"/>
+              </a:ext>
+            </a:extLst>
+          </p:cNvPr>
+          <p:cNvSpPr txBox="1"/>
+          <p:nvPr/>
+        </p:nvSpPr>
+        <p:spPr>
+          <a:xfrm>
+            <a:off x="352286" y="3125407"/>
+            <a:ext cx="2489602" cy="523220"/>
+          </a:xfrm>
+          <a:prstGeom prst="rect">
+            <a:avLst/>
+          </a:prstGeom>
+          <a:noFill/>
+        </p:spPr>
+        <p:txBody>
+          <a:bodyPr wrap="square">
+            <a:spAutoFit/>
+          </a:bodyPr>
+          <a:lstStyle/>
+          <a:p>
+            <a:r>
+              <a:rPr lang="en-US" sz="2800" b="1" dirty="0">
+                <a:solidFill>
+                  <a:srgbClr val="008000"/>
+                </a:solidFill>
+              </a:rPr>
+              <a:t>Net reaction </a:t>
+            </a:r>
+            <a:endParaRPr lang="en-US" sz="2800" dirty="0"/>
+          </a:p>
+        </p:txBody>
+      </p:sp>
+      <p:sp>
+        <p:nvSpPr>
+          <p:cNvPr id="26" name="TextBox 25">
+            <a:extLst>
+              <a:ext uri="{FF2B5EF4-FFF2-40B4-BE49-F238E27FC236}">
+                <a16:creationId xmlns:a16="http://schemas.microsoft.com/office/drawing/2014/main" id="{D7C838E8-46BA-1924-C2EA-A993A61D56D6}"/>
+              </a:ext>
+            </a:extLst>
+          </p:cNvPr>
+          <p:cNvSpPr txBox="1"/>
+          <p:nvPr/>
+        </p:nvSpPr>
+        <p:spPr>
+          <a:xfrm>
+            <a:off x="648522" y="5241924"/>
+            <a:ext cx="554960" cy="923330"/>
+          </a:xfrm>
+          <a:prstGeom prst="rect">
+            <a:avLst/>
+          </a:prstGeom>
+          <a:noFill/>
+        </p:spPr>
+        <p:txBody>
+          <a:bodyPr wrap="none" rtlCol="0">
+            <a:spAutoFit/>
+          </a:bodyPr>
+          <a:lstStyle/>
+          <a:p>
+            <a:r>
+              <a:rPr lang="en-US" sz="5400" b="1" dirty="0"/>
+              <a:t>+</a:t>
+            </a:r>
+          </a:p>
+        </p:txBody>
+      </p:sp>
+      <p:sp>
+        <p:nvSpPr>
+          <p:cNvPr id="27" name="TextBox 26">
+            <a:extLst>
+              <a:ext uri="{FF2B5EF4-FFF2-40B4-BE49-F238E27FC236}">
+                <a16:creationId xmlns:a16="http://schemas.microsoft.com/office/drawing/2014/main" id="{302FC71F-A6C7-110A-D807-B27349EF6715}"/>
+              </a:ext>
+            </a:extLst>
+          </p:cNvPr>
+          <p:cNvSpPr txBox="1"/>
+          <p:nvPr/>
+        </p:nvSpPr>
+        <p:spPr>
+          <a:xfrm>
+            <a:off x="5929235" y="5141728"/>
+            <a:ext cx="420308" cy="923330"/>
+          </a:xfrm>
+          <a:prstGeom prst="rect">
+            <a:avLst/>
+          </a:prstGeom>
+          <a:noFill/>
+        </p:spPr>
+        <p:txBody>
+          <a:bodyPr wrap="none" rtlCol="0">
+            <a:spAutoFit/>
+          </a:bodyPr>
+          <a:lstStyle/>
+          <a:p>
+            <a:r>
+              <a:rPr lang="en-US" sz="5400" b="1" dirty="0"/>
+              <a:t>-</a:t>
+            </a:r>
+          </a:p>
+        </p:txBody>
+      </p:sp>
+    </p:spTree>
+    <p:extLst>
+      <p:ext uri="{BB962C8B-B14F-4D97-AF65-F5344CB8AC3E}">
+        <p14:creationId xmlns:p14="http://schemas.microsoft.com/office/powerpoint/2010/main" val="2332685855"/>
       </p:ext>
     </p:extLst>
   </p:cSld>
